--- a/examples/recreations/17_Dropbox_Politics__Meme Creation/out_mat2ppt.pptx
+++ b/examples/recreations/17_Dropbox_Politics__Meme Creation/out_mat2ppt.pptx
@@ -3088,6 +3088,354 @@
         <p:nvPr/>
       </p:nvGrpSpPr>
       <p:grpSpPr/>
+      <p:pic>
+        <p:nvPicPr>
+          <p:cNvPr id="2" name="Picture 1" descr="image1.jpg"/>
+          <p:cNvPicPr>
+            <a:picLocks noChangeAspect="1"/>
+          </p:cNvPicPr>
+          <p:nvPr/>
+        </p:nvPicPr>
+        <p:blipFill>
+          <a:blip r:embed="rId2"/>
+          <a:stretch>
+            <a:fillRect/>
+          </a:stretch>
+        </p:blipFill>
+        <p:spPr>
+          <a:xfrm>
+            <a:off x="638175" y="309372"/>
+            <a:ext cx="4514850" cy="6477000"/>
+          </a:xfrm>
+          <a:prstGeom prst="rect">
+            <a:avLst/>
+          </a:prstGeom>
+        </p:spPr>
+      </p:pic>
+      <p:pic>
+        <p:nvPicPr>
+          <p:cNvPr id="3" name="Picture 2" descr="image2.jpg"/>
+          <p:cNvPicPr>
+            <a:picLocks noChangeAspect="1"/>
+          </p:cNvPicPr>
+          <p:nvPr/>
+        </p:nvPicPr>
+        <p:blipFill>
+          <a:blip r:embed="rId3"/>
+          <a:stretch>
+            <a:fillRect/>
+          </a:stretch>
+        </p:blipFill>
+        <p:spPr>
+          <a:xfrm>
+            <a:off x="5153025" y="309372"/>
+            <a:ext cx="4514851" cy="6456362"/>
+          </a:xfrm>
+          <a:prstGeom prst="rect">
+            <a:avLst/>
+          </a:prstGeom>
+        </p:spPr>
+      </p:pic>
+      <p:sp>
+        <p:nvSpPr>
+          <p:cNvPr id="4" name="Rectangle 3"/>
+          <p:cNvSpPr/>
+          <p:nvPr/>
+        </p:nvSpPr>
+        <p:spPr>
+          <a:xfrm>
+            <a:off x="638176" y="518474"/>
+            <a:ext cx="3132546" cy="400110"/>
+          </a:xfrm>
+          <a:prstGeom prst="rect">
+            <a:avLst/>
+          </a:prstGeom>
+        </p:spPr>
+        <p:style>
+          <a:lnRef idx="1">
+            <a:schemeClr val="accent1"/>
+          </a:lnRef>
+          <a:fillRef idx="3">
+            <a:schemeClr val="accent1"/>
+          </a:fillRef>
+          <a:effectRef idx="2">
+            <a:schemeClr val="accent1"/>
+          </a:effectRef>
+          <a:fontRef idx="minor">
+            <a:schemeClr val="lt1"/>
+          </a:fontRef>
+        </p:style>
+        <p:txBody>
+          <a:bodyPr rtlCol="0" anchor="ctr"/>
+          <a:lstStyle/>
+          <a:p>
+            <a:r>
+              <a:t>What they studied</a:t>
+            </a:r>
+          </a:p>
+        </p:txBody>
+      </p:sp>
+      <p:sp>
+        <p:nvSpPr>
+          <p:cNvPr id="5" name="downArrow 4"/>
+          <p:cNvSpPr/>
+          <p:nvPr/>
+        </p:nvSpPr>
+        <p:spPr>
+          <a:xfrm>
+            <a:off x="2815042" y="590104"/>
+            <a:ext cx="245097" cy="254524"/>
+          </a:xfrm>
+          <a:prstGeom prst="downArrow">
+            <a:avLst/>
+          </a:prstGeom>
+        </p:spPr>
+        <p:style>
+          <a:lnRef idx="1">
+            <a:schemeClr val="accent1"/>
+          </a:lnRef>
+          <a:fillRef idx="3">
+            <a:schemeClr val="accent1"/>
+          </a:fillRef>
+          <a:effectRef idx="2">
+            <a:schemeClr val="accent1"/>
+          </a:effectRef>
+          <a:fontRef idx="minor">
+            <a:schemeClr val="lt1"/>
+          </a:fontRef>
+        </p:style>
+        <p:txBody>
+          <a:bodyPr rtlCol="0" anchor="ctr"/>
+          <a:lstStyle/>
+          <a:p>
+            <a:pPr algn="ctr"/>
+          </a:p>
+        </p:txBody>
+      </p:sp>
+      <p:sp>
+        <p:nvSpPr>
+          <p:cNvPr id="6" name="downArrow 5"/>
+          <p:cNvSpPr/>
+          <p:nvPr/>
+        </p:nvSpPr>
+        <p:spPr>
+          <a:xfrm>
+            <a:off x="3112880" y="590104"/>
+            <a:ext cx="245097" cy="254524"/>
+          </a:xfrm>
+          <a:prstGeom prst="downArrow">
+            <a:avLst/>
+          </a:prstGeom>
+        </p:spPr>
+        <p:style>
+          <a:lnRef idx="1">
+            <a:schemeClr val="accent1"/>
+          </a:lnRef>
+          <a:fillRef idx="3">
+            <a:schemeClr val="accent1"/>
+          </a:fillRef>
+          <a:effectRef idx="2">
+            <a:schemeClr val="accent1"/>
+          </a:effectRef>
+          <a:fontRef idx="minor">
+            <a:schemeClr val="lt1"/>
+          </a:fontRef>
+        </p:style>
+        <p:txBody>
+          <a:bodyPr rtlCol="0" anchor="ctr"/>
+          <a:lstStyle/>
+          <a:p>
+            <a:pPr algn="ctr"/>
+          </a:p>
+        </p:txBody>
+      </p:sp>
+      <p:sp>
+        <p:nvSpPr>
+          <p:cNvPr id="7" name="downArrow 6"/>
+          <p:cNvSpPr/>
+          <p:nvPr/>
+        </p:nvSpPr>
+        <p:spPr>
+          <a:xfrm>
+            <a:off x="3410717" y="590104"/>
+            <a:ext cx="245097" cy="254524"/>
+          </a:xfrm>
+          <a:prstGeom prst="downArrow">
+            <a:avLst/>
+          </a:prstGeom>
+        </p:spPr>
+        <p:style>
+          <a:lnRef idx="1">
+            <a:schemeClr val="accent1"/>
+          </a:lnRef>
+          <a:fillRef idx="3">
+            <a:schemeClr val="accent1"/>
+          </a:fillRef>
+          <a:effectRef idx="2">
+            <a:schemeClr val="accent1"/>
+          </a:effectRef>
+          <a:fontRef idx="minor">
+            <a:schemeClr val="lt1"/>
+          </a:fontRef>
+        </p:style>
+        <p:txBody>
+          <a:bodyPr rtlCol="0" anchor="ctr"/>
+          <a:lstStyle/>
+          <a:p>
+            <a:pPr algn="ctr"/>
+          </a:p>
+        </p:txBody>
+      </p:sp>
+      <p:sp>
+        <p:nvSpPr>
+          <p:cNvPr id="8" name="Rectangle 7"/>
+          <p:cNvSpPr/>
+          <p:nvPr/>
+        </p:nvSpPr>
+        <p:spPr>
+          <a:xfrm>
+            <a:off x="1233903" y="518474"/>
+            <a:ext cx="1276918" cy="400110"/>
+          </a:xfrm>
+          <a:prstGeom prst="rect">
+            <a:avLst/>
+          </a:prstGeom>
+        </p:spPr>
+        <p:style>
+          <a:lnRef idx="1">
+            <a:schemeClr val="accent1"/>
+          </a:lnRef>
+          <a:fillRef idx="3">
+            <a:schemeClr val="accent1"/>
+          </a:fillRef>
+          <a:effectRef idx="2">
+            <a:schemeClr val="accent1"/>
+          </a:effectRef>
+          <a:fontRef idx="minor">
+            <a:schemeClr val="lt1"/>
+          </a:fontRef>
+        </p:style>
+        <p:txBody>
+          <a:bodyPr rtlCol="0" anchor="ctr"/>
+          <a:lstStyle/>
+          <a:p>
+            <a:r>
+              <a:t>The exam</a:t>
+            </a:r>
+          </a:p>
+        </p:txBody>
+      </p:sp>
+      <p:sp>
+        <p:nvSpPr>
+          <p:cNvPr id="9" name="downArrow 8"/>
+          <p:cNvSpPr/>
+          <p:nvPr/>
+        </p:nvSpPr>
+        <p:spPr>
+          <a:xfrm>
+            <a:off x="2485100" y="590104"/>
+            <a:ext cx="245097" cy="254524"/>
+          </a:xfrm>
+          <a:prstGeom prst="downArrow">
+            <a:avLst/>
+          </a:prstGeom>
+        </p:spPr>
+        <p:style>
+          <a:lnRef idx="1">
+            <a:schemeClr val="accent1"/>
+          </a:lnRef>
+          <a:fillRef idx="3">
+            <a:schemeClr val="accent1"/>
+          </a:fillRef>
+          <a:effectRef idx="2">
+            <a:schemeClr val="accent1"/>
+          </a:effectRef>
+          <a:fontRef idx="minor">
+            <a:schemeClr val="lt1"/>
+          </a:fontRef>
+        </p:style>
+        <p:txBody>
+          <a:bodyPr rtlCol="0" anchor="ctr"/>
+          <a:lstStyle/>
+          <a:p>
+            <a:pPr algn="ctr"/>
+          </a:p>
+        </p:txBody>
+      </p:sp>
+      <p:sp>
+        <p:nvSpPr>
+          <p:cNvPr id="10" name="downArrow 9"/>
+          <p:cNvSpPr/>
+          <p:nvPr/>
+        </p:nvSpPr>
+        <p:spPr>
+          <a:xfrm>
+            <a:off x="2782938" y="590104"/>
+            <a:ext cx="245097" cy="254524"/>
+          </a:xfrm>
+          <a:prstGeom prst="downArrow">
+            <a:avLst/>
+          </a:prstGeom>
+        </p:spPr>
+        <p:style>
+          <a:lnRef idx="1">
+            <a:schemeClr val="accent1"/>
+          </a:lnRef>
+          <a:fillRef idx="3">
+            <a:schemeClr val="accent1"/>
+          </a:fillRef>
+          <a:effectRef idx="2">
+            <a:schemeClr val="accent1"/>
+          </a:effectRef>
+          <a:fontRef idx="minor">
+            <a:schemeClr val="lt1"/>
+          </a:fontRef>
+        </p:style>
+        <p:txBody>
+          <a:bodyPr rtlCol="0" anchor="ctr"/>
+          <a:lstStyle/>
+          <a:p>
+            <a:pPr algn="ctr"/>
+          </a:p>
+        </p:txBody>
+      </p:sp>
+      <p:sp>
+        <p:nvSpPr>
+          <p:cNvPr id="11" name="downArrow 10"/>
+          <p:cNvSpPr/>
+          <p:nvPr/>
+        </p:nvSpPr>
+        <p:spPr>
+          <a:xfrm>
+            <a:off x="3080775" y="590104"/>
+            <a:ext cx="245097" cy="254524"/>
+          </a:xfrm>
+          <a:prstGeom prst="downArrow">
+            <a:avLst/>
+          </a:prstGeom>
+        </p:spPr>
+        <p:style>
+          <a:lnRef idx="1">
+            <a:schemeClr val="accent1"/>
+          </a:lnRef>
+          <a:fillRef idx="3">
+            <a:schemeClr val="accent1"/>
+          </a:fillRef>
+          <a:effectRef idx="2">
+            <a:schemeClr val="accent1"/>
+          </a:effectRef>
+          <a:fontRef idx="minor">
+            <a:schemeClr val="lt1"/>
+          </a:fontRef>
+        </p:style>
+        <p:txBody>
+          <a:bodyPr rtlCol="0" anchor="ctr"/>
+          <a:lstStyle/>
+          <a:p>
+            <a:pPr algn="ctr"/>
+          </a:p>
+        </p:txBody>
+      </p:sp>
     </p:spTree>
   </p:cSld>
   <p:clrMapOvr>

--- a/examples/recreations/17_Dropbox_Politics__Meme Creation/out_mat2ppt.pptx
+++ b/examples/recreations/17_Dropbox_Politics__Meme Creation/out_mat2ppt.pptx
@@ -1,19 +1,19 @@
 
 <file path=ppt/presentation.xml><?xml version="1.0" encoding="utf-8"?>
-<p:presentation xmlns:a="http://schemas.openxmlformats.org/drawingml/2006/main" xmlns:r="http://schemas.openxmlformats.org/officeDocument/2006/relationships" xmlns:p="http://schemas.openxmlformats.org/presentationml/2006/main" saveSubsetFonts="1" autoCompressPictures="0">
+<p:presentation xmlns:a="http://schemas.openxmlformats.org/drawingml/2006/main" xmlns:r="http://schemas.openxmlformats.org/officeDocument/2006/relationships" xmlns:p="http://schemas.openxmlformats.org/presentationml/2006/main" saveSubsetFonts="1">
   <p:sldMasterIdLst>
     <p:sldMasterId id="2147483648" r:id="rId1"/>
   </p:sldMasterIdLst>
   <p:sldIdLst>
     <p:sldId id="256" r:id="rId7"/>
   </p:sldIdLst>
-  <p:sldSz cx="12192000" cy="6858000" type="screen4x3"/>
+  <p:sldSz cx="12192000" cy="6858000"/>
   <p:notesSz cx="6858000" cy="9144000"/>
   <p:defaultTextStyle>
     <a:defPPr>
       <a:defRPr lang="en-US"/>
     </a:defPPr>
-    <a:lvl1pPr marL="0" algn="l" defTabSz="457200" rtl="0" eaLnBrk="1" latinLnBrk="0" hangingPunct="1">
+    <a:lvl1pPr marL="0" algn="l" defTabSz="914400" rtl="0" eaLnBrk="1" latinLnBrk="0" hangingPunct="1">
       <a:defRPr sz="1800" kern="1200">
         <a:solidFill>
           <a:schemeClr val="tx1"/>
@@ -23,7 +23,7 @@
         <a:cs typeface="+mn-cs"/>
       </a:defRPr>
     </a:lvl1pPr>
-    <a:lvl2pPr marL="457200" algn="l" defTabSz="457200" rtl="0" eaLnBrk="1" latinLnBrk="0" hangingPunct="1">
+    <a:lvl2pPr marL="457200" algn="l" defTabSz="914400" rtl="0" eaLnBrk="1" latinLnBrk="0" hangingPunct="1">
       <a:defRPr sz="1800" kern="1200">
         <a:solidFill>
           <a:schemeClr val="tx1"/>
@@ -33,7 +33,7 @@
         <a:cs typeface="+mn-cs"/>
       </a:defRPr>
     </a:lvl2pPr>
-    <a:lvl3pPr marL="914400" algn="l" defTabSz="457200" rtl="0" eaLnBrk="1" latinLnBrk="0" hangingPunct="1">
+    <a:lvl3pPr marL="914400" algn="l" defTabSz="914400" rtl="0" eaLnBrk="1" latinLnBrk="0" hangingPunct="1">
       <a:defRPr sz="1800" kern="1200">
         <a:solidFill>
           <a:schemeClr val="tx1"/>
@@ -43,7 +43,7 @@
         <a:cs typeface="+mn-cs"/>
       </a:defRPr>
     </a:lvl3pPr>
-    <a:lvl4pPr marL="1371600" algn="l" defTabSz="457200" rtl="0" eaLnBrk="1" latinLnBrk="0" hangingPunct="1">
+    <a:lvl4pPr marL="1371600" algn="l" defTabSz="914400" rtl="0" eaLnBrk="1" latinLnBrk="0" hangingPunct="1">
       <a:defRPr sz="1800" kern="1200">
         <a:solidFill>
           <a:schemeClr val="tx1"/>
@@ -53,7 +53,7 @@
         <a:cs typeface="+mn-cs"/>
       </a:defRPr>
     </a:lvl4pPr>
-    <a:lvl5pPr marL="1828800" algn="l" defTabSz="457200" rtl="0" eaLnBrk="1" latinLnBrk="0" hangingPunct="1">
+    <a:lvl5pPr marL="1828800" algn="l" defTabSz="914400" rtl="0" eaLnBrk="1" latinLnBrk="0" hangingPunct="1">
       <a:defRPr sz="1800" kern="1200">
         <a:solidFill>
           <a:schemeClr val="tx1"/>
@@ -63,7 +63,7 @@
         <a:cs typeface="+mn-cs"/>
       </a:defRPr>
     </a:lvl5pPr>
-    <a:lvl6pPr marL="2286000" algn="l" defTabSz="457200" rtl="0" eaLnBrk="1" latinLnBrk="0" hangingPunct="1">
+    <a:lvl6pPr marL="2286000" algn="l" defTabSz="914400" rtl="0" eaLnBrk="1" latinLnBrk="0" hangingPunct="1">
       <a:defRPr sz="1800" kern="1200">
         <a:solidFill>
           <a:schemeClr val="tx1"/>
@@ -73,7 +73,7 @@
         <a:cs typeface="+mn-cs"/>
       </a:defRPr>
     </a:lvl6pPr>
-    <a:lvl7pPr marL="2743200" algn="l" defTabSz="457200" rtl="0" eaLnBrk="1" latinLnBrk="0" hangingPunct="1">
+    <a:lvl7pPr marL="2743200" algn="l" defTabSz="914400" rtl="0" eaLnBrk="1" latinLnBrk="0" hangingPunct="1">
       <a:defRPr sz="1800" kern="1200">
         <a:solidFill>
           <a:schemeClr val="tx1"/>
@@ -83,7 +83,7 @@
         <a:cs typeface="+mn-cs"/>
       </a:defRPr>
     </a:lvl7pPr>
-    <a:lvl8pPr marL="3200400" algn="l" defTabSz="457200" rtl="0" eaLnBrk="1" latinLnBrk="0" hangingPunct="1">
+    <a:lvl8pPr marL="3200400" algn="l" defTabSz="914400" rtl="0" eaLnBrk="1" latinLnBrk="0" hangingPunct="1">
       <a:defRPr sz="1800" kern="1200">
         <a:solidFill>
           <a:schemeClr val="tx1"/>
@@ -93,7 +93,7 @@
         <a:cs typeface="+mn-cs"/>
       </a:defRPr>
     </a:lvl8pPr>
-    <a:lvl9pPr marL="3657600" algn="l" defTabSz="457200" rtl="0" eaLnBrk="1" latinLnBrk="0" hangingPunct="1">
+    <a:lvl9pPr marL="3657600" algn="l" defTabSz="914400" rtl="0" eaLnBrk="1" latinLnBrk="0" hangingPunct="1">
       <a:defRPr sz="1800" kern="1200">
         <a:solidFill>
           <a:schemeClr val="tx1"/>
@@ -104,6 +104,22 @@
       </a:defRPr>
     </a:lvl9pPr>
   </p:defaultTextStyle>
+  <p:extLst>
+    <p:ext uri="{EFAFB233-063F-42B5-8137-9DF3F51BA10A}">
+      <p15:sldGuideLst xmlns:p15="http://schemas.microsoft.com/office/powerpoint/2012/main">
+        <p15:guide id="1" orient="horz" pos="2160" userDrawn="1">
+          <p15:clr>
+            <a:srgbClr val="A4A3A4"/>
+          </p15:clr>
+        </p15:guide>
+        <p15:guide id="2" pos="3840" userDrawn="1">
+          <p15:clr>
+            <a:srgbClr val="A4A3A4"/>
+          </p15:clr>
+        </p15:guide>
+      </p15:sldGuideLst>
+    </p:ext>
+  </p:extLst>
 </p:presentation>
 </file>
 
@@ -126,7 +142,13 @@
       </p:grpSpPr>
       <p:sp>
         <p:nvSpPr>
-          <p:cNvPr id="2" name="Title 1"/>
+          <p:cNvPr id="2" name="Title 1">
+            <a:extLst>
+              <a:ext uri="{FF2B5EF4-FFF2-40B4-BE49-F238E27FC236}">
+                <a16:creationId xmlns:a16="http://schemas.microsoft.com/office/drawing/2014/main" id="{14F0DD0B-F32B-4AB0-8256-A7C7DC65D4B6}"/>
+              </a:ext>
+            </a:extLst>
+          </p:cNvPr>
           <p:cNvSpPr>
             <a:spLocks noGrp="1"/>
           </p:cNvSpPr>
@@ -136,25 +158,34 @@
         </p:nvSpPr>
         <p:spPr>
           <a:xfrm>
-            <a:off x="685800" y="2130425"/>
-            <a:ext cx="7772400" cy="1470025"/>
+            <a:off x="1524000" y="1122363"/>
+            <a:ext cx="9144000" cy="2387600"/>
           </a:xfrm>
         </p:spPr>
         <p:txBody>
-          <a:bodyPr/>
-          <a:lstStyle/>
-          <a:p>
-            <a:r>
-              <a:rPr lang="en-US" smtClean="0"/>
+          <a:bodyPr anchor="b"/>
+          <a:lstStyle>
+            <a:lvl1pPr algn="ctr">
+              <a:defRPr sz="6000"/>
+            </a:lvl1pPr>
+          </a:lstStyle>
+          <a:p>
+            <a:r>
+              <a:rPr lang="en-US"/>
               <a:t>Click to edit Master title style</a:t>
             </a:r>
-            <a:endParaRPr lang="en-US"/>
-          </a:p>
-        </p:txBody>
-      </p:sp>
-      <p:sp>
-        <p:nvSpPr>
-          <p:cNvPr id="3" name="Subtitle 2"/>
+          </a:p>
+        </p:txBody>
+      </p:sp>
+      <p:sp>
+        <p:nvSpPr>
+          <p:cNvPr id="3" name="Subtitle 2">
+            <a:extLst>
+              <a:ext uri="{FF2B5EF4-FFF2-40B4-BE49-F238E27FC236}">
+                <a16:creationId xmlns:a16="http://schemas.microsoft.com/office/drawing/2014/main" id="{48301465-B539-42B6-8E78-77A368BD070F}"/>
+              </a:ext>
+            </a:extLst>
+          </p:cNvPr>
           <p:cNvSpPr>
             <a:spLocks noGrp="1"/>
           </p:cNvSpPr>
@@ -164,8 +195,8 @@
         </p:nvSpPr>
         <p:spPr>
           <a:xfrm>
-            <a:off x="1371600" y="3886200"/>
-            <a:ext cx="6400800" cy="1752600"/>
+            <a:off x="1524000" y="3602038"/>
+            <a:ext cx="9144000" cy="1655762"/>
           </a:xfrm>
         </p:spPr>
         <p:txBody>
@@ -173,122 +204,73 @@
           <a:lstStyle>
             <a:lvl1pPr marL="0" indent="0" algn="ctr">
               <a:buNone/>
-              <a:defRPr>
-                <a:solidFill>
-                  <a:schemeClr val="tx1">
-                    <a:tint val="75000"/>
-                  </a:schemeClr>
-                </a:solidFill>
-              </a:defRPr>
+              <a:defRPr sz="2400"/>
             </a:lvl1pPr>
             <a:lvl2pPr marL="457200" indent="0" algn="ctr">
               <a:buNone/>
-              <a:defRPr>
-                <a:solidFill>
-                  <a:schemeClr val="tx1">
-                    <a:tint val="75000"/>
-                  </a:schemeClr>
-                </a:solidFill>
-              </a:defRPr>
+              <a:defRPr sz="2000"/>
             </a:lvl2pPr>
             <a:lvl3pPr marL="914400" indent="0" algn="ctr">
               <a:buNone/>
-              <a:defRPr>
-                <a:solidFill>
-                  <a:schemeClr val="tx1">
-                    <a:tint val="75000"/>
-                  </a:schemeClr>
-                </a:solidFill>
-              </a:defRPr>
+              <a:defRPr sz="1800"/>
             </a:lvl3pPr>
             <a:lvl4pPr marL="1371600" indent="0" algn="ctr">
               <a:buNone/>
-              <a:defRPr>
-                <a:solidFill>
-                  <a:schemeClr val="tx1">
-                    <a:tint val="75000"/>
-                  </a:schemeClr>
-                </a:solidFill>
-              </a:defRPr>
+              <a:defRPr sz="1600"/>
             </a:lvl4pPr>
             <a:lvl5pPr marL="1828800" indent="0" algn="ctr">
               <a:buNone/>
-              <a:defRPr>
-                <a:solidFill>
-                  <a:schemeClr val="tx1">
-                    <a:tint val="75000"/>
-                  </a:schemeClr>
-                </a:solidFill>
-              </a:defRPr>
+              <a:defRPr sz="1600"/>
             </a:lvl5pPr>
             <a:lvl6pPr marL="2286000" indent="0" algn="ctr">
               <a:buNone/>
-              <a:defRPr>
-                <a:solidFill>
-                  <a:schemeClr val="tx1">
-                    <a:tint val="75000"/>
-                  </a:schemeClr>
-                </a:solidFill>
-              </a:defRPr>
+              <a:defRPr sz="1600"/>
             </a:lvl6pPr>
             <a:lvl7pPr marL="2743200" indent="0" algn="ctr">
               <a:buNone/>
-              <a:defRPr>
-                <a:solidFill>
-                  <a:schemeClr val="tx1">
-                    <a:tint val="75000"/>
-                  </a:schemeClr>
-                </a:solidFill>
-              </a:defRPr>
+              <a:defRPr sz="1600"/>
             </a:lvl7pPr>
             <a:lvl8pPr marL="3200400" indent="0" algn="ctr">
               <a:buNone/>
-              <a:defRPr>
-                <a:solidFill>
-                  <a:schemeClr val="tx1">
-                    <a:tint val="75000"/>
-                  </a:schemeClr>
-                </a:solidFill>
-              </a:defRPr>
+              <a:defRPr sz="1600"/>
             </a:lvl8pPr>
             <a:lvl9pPr marL="3657600" indent="0" algn="ctr">
               <a:buNone/>
-              <a:defRPr>
-                <a:solidFill>
-                  <a:schemeClr val="tx1">
-                    <a:tint val="75000"/>
-                  </a:schemeClr>
-                </a:solidFill>
-              </a:defRPr>
+              <a:defRPr sz="1600"/>
             </a:lvl9pPr>
           </a:lstStyle>
           <a:p>
             <a:r>
+              <a:rPr lang="en-US"/>
+              <a:t>Click to edit Master subtitle style</a:t>
+            </a:r>
+          </a:p>
+        </p:txBody>
+      </p:sp>
+      <p:sp>
+        <p:nvSpPr>
+          <p:cNvPr id="4" name="Date Placeholder 3">
+            <a:extLst>
+              <a:ext uri="{FF2B5EF4-FFF2-40B4-BE49-F238E27FC236}">
+                <a16:creationId xmlns:a16="http://schemas.microsoft.com/office/drawing/2014/main" id="{C88B67BD-3346-45E2-98C6-D147C5C4B462}"/>
+              </a:ext>
+            </a:extLst>
+          </p:cNvPr>
+          <p:cNvSpPr>
+            <a:spLocks noGrp="1"/>
+          </p:cNvSpPr>
+          <p:nvPr>
+            <p:ph type="dt" sz="half" idx="10"/>
+          </p:nvPr>
+        </p:nvSpPr>
+        <p:spPr/>
+        <p:txBody>
+          <a:bodyPr/>
+          <a:lstStyle/>
+          <a:p>
+            <a:fld id="{6F3F5EC3-68B3-43B2-9B30-E347987FCF54}" type="datetimeFigureOut">
               <a:rPr lang="en-US" smtClean="0"/>
-              <a:t>Click to edit Master subtitle style</a:t>
-            </a:r>
-            <a:endParaRPr lang="en-US"/>
-          </a:p>
-        </p:txBody>
-      </p:sp>
-      <p:sp>
-        <p:nvSpPr>
-          <p:cNvPr id="4" name="Date Placeholder 3"/>
-          <p:cNvSpPr>
-            <a:spLocks noGrp="1"/>
-          </p:cNvSpPr>
-          <p:nvPr>
-            <p:ph type="dt" sz="half" idx="10"/>
-          </p:nvPr>
-        </p:nvSpPr>
-        <p:spPr/>
-        <p:txBody>
-          <a:bodyPr/>
-          <a:lstStyle/>
-          <a:p>
-            <a:fld id="{5BCAD085-E8A6-8845-BD4E-CB4CCA059FC4}" type="datetimeFigureOut">
-              <a:rPr lang="en-US" smtClean="0"/>
-              <a:t>1/27/13</a:t>
+              <a:t>8/14/2021</a:t>
             </a:fld>
             <a:endParaRPr lang="en-US"/>
           </a:p>
@@ -296,7 +278,13 @@
       </p:sp>
       <p:sp>
         <p:nvSpPr>
-          <p:cNvPr id="5" name="Footer Placeholder 4"/>
+          <p:cNvPr id="5" name="Footer Placeholder 4">
+            <a:extLst>
+              <a:ext uri="{FF2B5EF4-FFF2-40B4-BE49-F238E27FC236}">
+                <a16:creationId xmlns:a16="http://schemas.microsoft.com/office/drawing/2014/main" id="{816F56CB-D8F1-4CC2-BEC3-A54465A53880}"/>
+              </a:ext>
+            </a:extLst>
+          </p:cNvPr>
           <p:cNvSpPr>
             <a:spLocks noGrp="1"/>
           </p:cNvSpPr>
@@ -315,7 +303,13 @@
       </p:sp>
       <p:sp>
         <p:nvSpPr>
-          <p:cNvPr id="6" name="Slide Number Placeholder 5"/>
+          <p:cNvPr id="6" name="Slide Number Placeholder 5">
+            <a:extLst>
+              <a:ext uri="{FF2B5EF4-FFF2-40B4-BE49-F238E27FC236}">
+                <a16:creationId xmlns:a16="http://schemas.microsoft.com/office/drawing/2014/main" id="{3FA60844-616B-4466-9361-191397E44FFC}"/>
+              </a:ext>
+            </a:extLst>
+          </p:cNvPr>
           <p:cNvSpPr>
             <a:spLocks noGrp="1"/>
           </p:cNvSpPr>
@@ -328,7 +322,7 @@
           <a:bodyPr/>
           <a:lstStyle/>
           <a:p>
-            <a:fld id="{C1FF6DA9-008F-8B48-92A6-B652298478BF}" type="slidenum">
+            <a:fld id="{6357C050-2BB0-42CB-AF71-1035C47D7F82}" type="slidenum">
               <a:rPr lang="en-US" smtClean="0"/>
               <a:t>‹#›</a:t>
             </a:fld>
@@ -339,7 +333,7 @@
     </p:spTree>
     <p:extLst>
       <p:ext uri="{BB962C8B-B14F-4D97-AF65-F5344CB8AC3E}">
-        <p14:creationId xmlns:p14="http://schemas.microsoft.com/office/powerpoint/2010/main" val="3168075583"/>
+        <p14:creationId xmlns:p14="http://schemas.microsoft.com/office/powerpoint/2010/main" val="3006333146"/>
       </p:ext>
     </p:extLst>
   </p:cSld>
@@ -368,7 +362,13 @@
       </p:grpSpPr>
       <p:sp>
         <p:nvSpPr>
-          <p:cNvPr id="2" name="Title 1"/>
+          <p:cNvPr id="2" name="Title 1">
+            <a:extLst>
+              <a:ext uri="{FF2B5EF4-FFF2-40B4-BE49-F238E27FC236}">
+                <a16:creationId xmlns:a16="http://schemas.microsoft.com/office/drawing/2014/main" id="{54D1B2F7-0191-4DAB-BC51-B962232B1575}"/>
+              </a:ext>
+            </a:extLst>
+          </p:cNvPr>
           <p:cNvSpPr>
             <a:spLocks noGrp="1"/>
           </p:cNvSpPr>
@@ -382,83 +382,93 @@
           <a:lstStyle/>
           <a:p>
             <a:r>
+              <a:rPr lang="en-US"/>
+              <a:t>Click to edit Master title style</a:t>
+            </a:r>
+          </a:p>
+        </p:txBody>
+      </p:sp>
+      <p:sp>
+        <p:nvSpPr>
+          <p:cNvPr id="3" name="Vertical Text Placeholder 2">
+            <a:extLst>
+              <a:ext uri="{FF2B5EF4-FFF2-40B4-BE49-F238E27FC236}">
+                <a16:creationId xmlns:a16="http://schemas.microsoft.com/office/drawing/2014/main" id="{B94E10DB-449B-470C-BD7D-D163D9E23785}"/>
+              </a:ext>
+            </a:extLst>
+          </p:cNvPr>
+          <p:cNvSpPr>
+            <a:spLocks noGrp="1"/>
+          </p:cNvSpPr>
+          <p:nvPr>
+            <p:ph type="body" orient="vert" idx="1"/>
+          </p:nvPr>
+        </p:nvSpPr>
+        <p:spPr/>
+        <p:txBody>
+          <a:bodyPr vert="eaVert"/>
+          <a:lstStyle/>
+          <a:p>
+            <a:pPr lvl="0"/>
+            <a:r>
+              <a:rPr lang="en-US"/>
+              <a:t>Click to edit Master text styles</a:t>
+            </a:r>
+          </a:p>
+          <a:p>
+            <a:pPr lvl="1"/>
+            <a:r>
+              <a:rPr lang="en-US"/>
+              <a:t>Second level</a:t>
+            </a:r>
+          </a:p>
+          <a:p>
+            <a:pPr lvl="2"/>
+            <a:r>
+              <a:rPr lang="en-US"/>
+              <a:t>Third level</a:t>
+            </a:r>
+          </a:p>
+          <a:p>
+            <a:pPr lvl="3"/>
+            <a:r>
+              <a:rPr lang="en-US"/>
+              <a:t>Fourth level</a:t>
+            </a:r>
+          </a:p>
+          <a:p>
+            <a:pPr lvl="4"/>
+            <a:r>
+              <a:rPr lang="en-US"/>
+              <a:t>Fifth level</a:t>
+            </a:r>
+          </a:p>
+        </p:txBody>
+      </p:sp>
+      <p:sp>
+        <p:nvSpPr>
+          <p:cNvPr id="4" name="Date Placeholder 3">
+            <a:extLst>
+              <a:ext uri="{FF2B5EF4-FFF2-40B4-BE49-F238E27FC236}">
+                <a16:creationId xmlns:a16="http://schemas.microsoft.com/office/drawing/2014/main" id="{75E56985-D415-4153-B092-76D711858403}"/>
+              </a:ext>
+            </a:extLst>
+          </p:cNvPr>
+          <p:cNvSpPr>
+            <a:spLocks noGrp="1"/>
+          </p:cNvSpPr>
+          <p:nvPr>
+            <p:ph type="dt" sz="half" idx="10"/>
+          </p:nvPr>
+        </p:nvSpPr>
+        <p:spPr/>
+        <p:txBody>
+          <a:bodyPr/>
+          <a:lstStyle/>
+          <a:p>
+            <a:fld id="{6F3F5EC3-68B3-43B2-9B30-E347987FCF54}" type="datetimeFigureOut">
               <a:rPr lang="en-US" smtClean="0"/>
-              <a:t>Click to edit Master title style</a:t>
-            </a:r>
-            <a:endParaRPr lang="en-US"/>
-          </a:p>
-        </p:txBody>
-      </p:sp>
-      <p:sp>
-        <p:nvSpPr>
-          <p:cNvPr id="3" name="Vertical Text Placeholder 2"/>
-          <p:cNvSpPr>
-            <a:spLocks noGrp="1"/>
-          </p:cNvSpPr>
-          <p:nvPr>
-            <p:ph type="body" orient="vert" idx="1"/>
-          </p:nvPr>
-        </p:nvSpPr>
-        <p:spPr/>
-        <p:txBody>
-          <a:bodyPr vert="eaVert"/>
-          <a:lstStyle/>
-          <a:p>
-            <a:pPr lvl="0"/>
-            <a:r>
-              <a:rPr lang="en-US" smtClean="0"/>
-              <a:t>Click to edit Master text styles</a:t>
-            </a:r>
-          </a:p>
-          <a:p>
-            <a:pPr lvl="1"/>
-            <a:r>
-              <a:rPr lang="en-US" smtClean="0"/>
-              <a:t>Second level</a:t>
-            </a:r>
-          </a:p>
-          <a:p>
-            <a:pPr lvl="2"/>
-            <a:r>
-              <a:rPr lang="en-US" smtClean="0"/>
-              <a:t>Third level</a:t>
-            </a:r>
-          </a:p>
-          <a:p>
-            <a:pPr lvl="3"/>
-            <a:r>
-              <a:rPr lang="en-US" smtClean="0"/>
-              <a:t>Fourth level</a:t>
-            </a:r>
-          </a:p>
-          <a:p>
-            <a:pPr lvl="4"/>
-            <a:r>
-              <a:rPr lang="en-US" smtClean="0"/>
-              <a:t>Fifth level</a:t>
-            </a:r>
-            <a:endParaRPr lang="en-US"/>
-          </a:p>
-        </p:txBody>
-      </p:sp>
-      <p:sp>
-        <p:nvSpPr>
-          <p:cNvPr id="4" name="Date Placeholder 3"/>
-          <p:cNvSpPr>
-            <a:spLocks noGrp="1"/>
-          </p:cNvSpPr>
-          <p:nvPr>
-            <p:ph type="dt" sz="half" idx="10"/>
-          </p:nvPr>
-        </p:nvSpPr>
-        <p:spPr/>
-        <p:txBody>
-          <a:bodyPr/>
-          <a:lstStyle/>
-          <a:p>
-            <a:fld id="{5BCAD085-E8A6-8845-BD4E-CB4CCA059FC4}" type="datetimeFigureOut">
-              <a:rPr lang="en-US" smtClean="0"/>
-              <a:t>1/27/13</a:t>
+              <a:t>8/14/2021</a:t>
             </a:fld>
             <a:endParaRPr lang="en-US"/>
           </a:p>
@@ -466,7 +476,13 @@
       </p:sp>
       <p:sp>
         <p:nvSpPr>
-          <p:cNvPr id="5" name="Footer Placeholder 4"/>
+          <p:cNvPr id="5" name="Footer Placeholder 4">
+            <a:extLst>
+              <a:ext uri="{FF2B5EF4-FFF2-40B4-BE49-F238E27FC236}">
+                <a16:creationId xmlns:a16="http://schemas.microsoft.com/office/drawing/2014/main" id="{1CD9A81C-5DAF-42E5-895B-86383C9D3172}"/>
+              </a:ext>
+            </a:extLst>
+          </p:cNvPr>
           <p:cNvSpPr>
             <a:spLocks noGrp="1"/>
           </p:cNvSpPr>
@@ -485,7 +501,13 @@
       </p:sp>
       <p:sp>
         <p:nvSpPr>
-          <p:cNvPr id="6" name="Slide Number Placeholder 5"/>
+          <p:cNvPr id="6" name="Slide Number Placeholder 5">
+            <a:extLst>
+              <a:ext uri="{FF2B5EF4-FFF2-40B4-BE49-F238E27FC236}">
+                <a16:creationId xmlns:a16="http://schemas.microsoft.com/office/drawing/2014/main" id="{BEE9EF20-2552-4472-B213-EE64FA2FA7DB}"/>
+              </a:ext>
+            </a:extLst>
+          </p:cNvPr>
           <p:cNvSpPr>
             <a:spLocks noGrp="1"/>
           </p:cNvSpPr>
@@ -498,7 +520,7 @@
           <a:bodyPr/>
           <a:lstStyle/>
           <a:p>
-            <a:fld id="{C1FF6DA9-008F-8B48-92A6-B652298478BF}" type="slidenum">
+            <a:fld id="{6357C050-2BB0-42CB-AF71-1035C47D7F82}" type="slidenum">
               <a:rPr lang="en-US" smtClean="0"/>
               <a:t>‹#›</a:t>
             </a:fld>
@@ -509,7 +531,7 @@
     </p:spTree>
     <p:extLst>
       <p:ext uri="{BB962C8B-B14F-4D97-AF65-F5344CB8AC3E}">
-        <p14:creationId xmlns:p14="http://schemas.microsoft.com/office/powerpoint/2010/main" val="2910927964"/>
+        <p14:creationId xmlns:p14="http://schemas.microsoft.com/office/powerpoint/2010/main" val="3547966326"/>
       </p:ext>
     </p:extLst>
   </p:cSld>
@@ -538,7 +560,13 @@
       </p:grpSpPr>
       <p:sp>
         <p:nvSpPr>
-          <p:cNvPr id="2" name="Vertical Title 1"/>
+          <p:cNvPr id="2" name="Vertical Title 1">
+            <a:extLst>
+              <a:ext uri="{FF2B5EF4-FFF2-40B4-BE49-F238E27FC236}">
+                <a16:creationId xmlns:a16="http://schemas.microsoft.com/office/drawing/2014/main" id="{B4018412-A76F-4046-8814-726F3D761FE9}"/>
+              </a:ext>
+            </a:extLst>
+          </p:cNvPr>
           <p:cNvSpPr>
             <a:spLocks noGrp="1"/>
           </p:cNvSpPr>
@@ -548,8 +576,8 @@
         </p:nvSpPr>
         <p:spPr>
           <a:xfrm>
-            <a:off x="6629400" y="274638"/>
-            <a:ext cx="2057400" cy="5851525"/>
+            <a:off x="8724900" y="365125"/>
+            <a:ext cx="2628900" cy="5811838"/>
           </a:xfrm>
         </p:spPr>
         <p:txBody>
@@ -557,16 +585,21 @@
           <a:lstStyle/>
           <a:p>
             <a:r>
-              <a:rPr lang="en-US" smtClean="0"/>
+              <a:rPr lang="en-US"/>
               <a:t>Click to edit Master title style</a:t>
             </a:r>
-            <a:endParaRPr lang="en-US"/>
-          </a:p>
-        </p:txBody>
-      </p:sp>
-      <p:sp>
-        <p:nvSpPr>
-          <p:cNvPr id="3" name="Vertical Text Placeholder 2"/>
+          </a:p>
+        </p:txBody>
+      </p:sp>
+      <p:sp>
+        <p:nvSpPr>
+          <p:cNvPr id="3" name="Vertical Text Placeholder 2">
+            <a:extLst>
+              <a:ext uri="{FF2B5EF4-FFF2-40B4-BE49-F238E27FC236}">
+                <a16:creationId xmlns:a16="http://schemas.microsoft.com/office/drawing/2014/main" id="{B327541D-27C1-4AF3-8BDC-7DFA9099F22B}"/>
+              </a:ext>
+            </a:extLst>
+          </p:cNvPr>
           <p:cNvSpPr>
             <a:spLocks noGrp="1"/>
           </p:cNvSpPr>
@@ -576,8 +609,8 @@
         </p:nvSpPr>
         <p:spPr>
           <a:xfrm>
-            <a:off x="457200" y="274638"/>
-            <a:ext cx="6019800" cy="5851525"/>
+            <a:off x="838200" y="365125"/>
+            <a:ext cx="7734300" cy="5811838"/>
           </a:xfrm>
         </p:spPr>
         <p:txBody>
@@ -586,59 +619,64 @@
           <a:p>
             <a:pPr lvl="0"/>
             <a:r>
+              <a:rPr lang="en-US"/>
+              <a:t>Click to edit Master text styles</a:t>
+            </a:r>
+          </a:p>
+          <a:p>
+            <a:pPr lvl="1"/>
+            <a:r>
+              <a:rPr lang="en-US"/>
+              <a:t>Second level</a:t>
+            </a:r>
+          </a:p>
+          <a:p>
+            <a:pPr lvl="2"/>
+            <a:r>
+              <a:rPr lang="en-US"/>
+              <a:t>Third level</a:t>
+            </a:r>
+          </a:p>
+          <a:p>
+            <a:pPr lvl="3"/>
+            <a:r>
+              <a:rPr lang="en-US"/>
+              <a:t>Fourth level</a:t>
+            </a:r>
+          </a:p>
+          <a:p>
+            <a:pPr lvl="4"/>
+            <a:r>
+              <a:rPr lang="en-US"/>
+              <a:t>Fifth level</a:t>
+            </a:r>
+          </a:p>
+        </p:txBody>
+      </p:sp>
+      <p:sp>
+        <p:nvSpPr>
+          <p:cNvPr id="4" name="Date Placeholder 3">
+            <a:extLst>
+              <a:ext uri="{FF2B5EF4-FFF2-40B4-BE49-F238E27FC236}">
+                <a16:creationId xmlns:a16="http://schemas.microsoft.com/office/drawing/2014/main" id="{E7905D69-7544-4828-9F2C-C7B25D213F40}"/>
+              </a:ext>
+            </a:extLst>
+          </p:cNvPr>
+          <p:cNvSpPr>
+            <a:spLocks noGrp="1"/>
+          </p:cNvSpPr>
+          <p:nvPr>
+            <p:ph type="dt" sz="half" idx="10"/>
+          </p:nvPr>
+        </p:nvSpPr>
+        <p:spPr/>
+        <p:txBody>
+          <a:bodyPr/>
+          <a:lstStyle/>
+          <a:p>
+            <a:fld id="{6F3F5EC3-68B3-43B2-9B30-E347987FCF54}" type="datetimeFigureOut">
               <a:rPr lang="en-US" smtClean="0"/>
-              <a:t>Click to edit Master text styles</a:t>
-            </a:r>
-          </a:p>
-          <a:p>
-            <a:pPr lvl="1"/>
-            <a:r>
-              <a:rPr lang="en-US" smtClean="0"/>
-              <a:t>Second level</a:t>
-            </a:r>
-          </a:p>
-          <a:p>
-            <a:pPr lvl="2"/>
-            <a:r>
-              <a:rPr lang="en-US" smtClean="0"/>
-              <a:t>Third level</a:t>
-            </a:r>
-          </a:p>
-          <a:p>
-            <a:pPr lvl="3"/>
-            <a:r>
-              <a:rPr lang="en-US" smtClean="0"/>
-              <a:t>Fourth level</a:t>
-            </a:r>
-          </a:p>
-          <a:p>
-            <a:pPr lvl="4"/>
-            <a:r>
-              <a:rPr lang="en-US" smtClean="0"/>
-              <a:t>Fifth level</a:t>
-            </a:r>
-            <a:endParaRPr lang="en-US"/>
-          </a:p>
-        </p:txBody>
-      </p:sp>
-      <p:sp>
-        <p:nvSpPr>
-          <p:cNvPr id="4" name="Date Placeholder 3"/>
-          <p:cNvSpPr>
-            <a:spLocks noGrp="1"/>
-          </p:cNvSpPr>
-          <p:nvPr>
-            <p:ph type="dt" sz="half" idx="10"/>
-          </p:nvPr>
-        </p:nvSpPr>
-        <p:spPr/>
-        <p:txBody>
-          <a:bodyPr/>
-          <a:lstStyle/>
-          <a:p>
-            <a:fld id="{5BCAD085-E8A6-8845-BD4E-CB4CCA059FC4}" type="datetimeFigureOut">
-              <a:rPr lang="en-US" smtClean="0"/>
-              <a:t>1/27/13</a:t>
+              <a:t>8/14/2021</a:t>
             </a:fld>
             <a:endParaRPr lang="en-US"/>
           </a:p>
@@ -646,7 +684,13 @@
       </p:sp>
       <p:sp>
         <p:nvSpPr>
-          <p:cNvPr id="5" name="Footer Placeholder 4"/>
+          <p:cNvPr id="5" name="Footer Placeholder 4">
+            <a:extLst>
+              <a:ext uri="{FF2B5EF4-FFF2-40B4-BE49-F238E27FC236}">
+                <a16:creationId xmlns:a16="http://schemas.microsoft.com/office/drawing/2014/main" id="{5C7121E4-2DA9-47FF-AD9E-4AF2D75E2E1F}"/>
+              </a:ext>
+            </a:extLst>
+          </p:cNvPr>
           <p:cNvSpPr>
             <a:spLocks noGrp="1"/>
           </p:cNvSpPr>
@@ -665,7 +709,13 @@
       </p:sp>
       <p:sp>
         <p:nvSpPr>
-          <p:cNvPr id="6" name="Slide Number Placeholder 5"/>
+          <p:cNvPr id="6" name="Slide Number Placeholder 5">
+            <a:extLst>
+              <a:ext uri="{FF2B5EF4-FFF2-40B4-BE49-F238E27FC236}">
+                <a16:creationId xmlns:a16="http://schemas.microsoft.com/office/drawing/2014/main" id="{E34358F8-A2B6-4230-A33C-F08BC98CC0C3}"/>
+              </a:ext>
+            </a:extLst>
+          </p:cNvPr>
           <p:cNvSpPr>
             <a:spLocks noGrp="1"/>
           </p:cNvSpPr>
@@ -678,7 +728,7 @@
           <a:bodyPr/>
           <a:lstStyle/>
           <a:p>
-            <a:fld id="{C1FF6DA9-008F-8B48-92A6-B652298478BF}" type="slidenum">
+            <a:fld id="{6357C050-2BB0-42CB-AF71-1035C47D7F82}" type="slidenum">
               <a:rPr lang="en-US" smtClean="0"/>
               <a:t>‹#›</a:t>
             </a:fld>
@@ -689,7 +739,7 @@
     </p:spTree>
     <p:extLst>
       <p:ext uri="{BB962C8B-B14F-4D97-AF65-F5344CB8AC3E}">
-        <p14:creationId xmlns:p14="http://schemas.microsoft.com/office/powerpoint/2010/main" val="3612223792"/>
+        <p14:creationId xmlns:p14="http://schemas.microsoft.com/office/powerpoint/2010/main" val="1135061006"/>
       </p:ext>
     </p:extLst>
   </p:cSld>
@@ -718,7 +768,13 @@
       </p:grpSpPr>
       <p:sp>
         <p:nvSpPr>
-          <p:cNvPr id="2" name="Title 1"/>
+          <p:cNvPr id="2" name="Title 1">
+            <a:extLst>
+              <a:ext uri="{FF2B5EF4-FFF2-40B4-BE49-F238E27FC236}">
+                <a16:creationId xmlns:a16="http://schemas.microsoft.com/office/drawing/2014/main" id="{0EF99AC1-52A1-4D43-934A-4E345501F906}"/>
+              </a:ext>
+            </a:extLst>
+          </p:cNvPr>
           <p:cNvSpPr>
             <a:spLocks noGrp="1"/>
           </p:cNvSpPr>
@@ -732,83 +788,93 @@
           <a:lstStyle/>
           <a:p>
             <a:r>
+              <a:rPr lang="en-US"/>
+              <a:t>Click to edit Master title style</a:t>
+            </a:r>
+          </a:p>
+        </p:txBody>
+      </p:sp>
+      <p:sp>
+        <p:nvSpPr>
+          <p:cNvPr id="3" name="Content Placeholder 2">
+            <a:extLst>
+              <a:ext uri="{FF2B5EF4-FFF2-40B4-BE49-F238E27FC236}">
+                <a16:creationId xmlns:a16="http://schemas.microsoft.com/office/drawing/2014/main" id="{C0ABB625-DD35-465F-A8A1-1A280A632AB7}"/>
+              </a:ext>
+            </a:extLst>
+          </p:cNvPr>
+          <p:cNvSpPr>
+            <a:spLocks noGrp="1"/>
+          </p:cNvSpPr>
+          <p:nvPr>
+            <p:ph idx="1"/>
+          </p:nvPr>
+        </p:nvSpPr>
+        <p:spPr/>
+        <p:txBody>
+          <a:bodyPr/>
+          <a:lstStyle/>
+          <a:p>
+            <a:pPr lvl="0"/>
+            <a:r>
+              <a:rPr lang="en-US"/>
+              <a:t>Click to edit Master text styles</a:t>
+            </a:r>
+          </a:p>
+          <a:p>
+            <a:pPr lvl="1"/>
+            <a:r>
+              <a:rPr lang="en-US"/>
+              <a:t>Second level</a:t>
+            </a:r>
+          </a:p>
+          <a:p>
+            <a:pPr lvl="2"/>
+            <a:r>
+              <a:rPr lang="en-US"/>
+              <a:t>Third level</a:t>
+            </a:r>
+          </a:p>
+          <a:p>
+            <a:pPr lvl="3"/>
+            <a:r>
+              <a:rPr lang="en-US"/>
+              <a:t>Fourth level</a:t>
+            </a:r>
+          </a:p>
+          <a:p>
+            <a:pPr lvl="4"/>
+            <a:r>
+              <a:rPr lang="en-US"/>
+              <a:t>Fifth level</a:t>
+            </a:r>
+          </a:p>
+        </p:txBody>
+      </p:sp>
+      <p:sp>
+        <p:nvSpPr>
+          <p:cNvPr id="4" name="Date Placeholder 3">
+            <a:extLst>
+              <a:ext uri="{FF2B5EF4-FFF2-40B4-BE49-F238E27FC236}">
+                <a16:creationId xmlns:a16="http://schemas.microsoft.com/office/drawing/2014/main" id="{09814F90-DADE-4B57-9A09-3DCA32A21D58}"/>
+              </a:ext>
+            </a:extLst>
+          </p:cNvPr>
+          <p:cNvSpPr>
+            <a:spLocks noGrp="1"/>
+          </p:cNvSpPr>
+          <p:nvPr>
+            <p:ph type="dt" sz="half" idx="10"/>
+          </p:nvPr>
+        </p:nvSpPr>
+        <p:spPr/>
+        <p:txBody>
+          <a:bodyPr/>
+          <a:lstStyle/>
+          <a:p>
+            <a:fld id="{6F3F5EC3-68B3-43B2-9B30-E347987FCF54}" type="datetimeFigureOut">
               <a:rPr lang="en-US" smtClean="0"/>
-              <a:t>Click to edit Master title style</a:t>
-            </a:r>
-            <a:endParaRPr lang="en-US"/>
-          </a:p>
-        </p:txBody>
-      </p:sp>
-      <p:sp>
-        <p:nvSpPr>
-          <p:cNvPr id="3" name="Content Placeholder 2"/>
-          <p:cNvSpPr>
-            <a:spLocks noGrp="1"/>
-          </p:cNvSpPr>
-          <p:nvPr>
-            <p:ph idx="1"/>
-          </p:nvPr>
-        </p:nvSpPr>
-        <p:spPr/>
-        <p:txBody>
-          <a:bodyPr/>
-          <a:lstStyle/>
-          <a:p>
-            <a:pPr lvl="0"/>
-            <a:r>
-              <a:rPr lang="en-US" smtClean="0"/>
-              <a:t>Click to edit Master text styles</a:t>
-            </a:r>
-          </a:p>
-          <a:p>
-            <a:pPr lvl="1"/>
-            <a:r>
-              <a:rPr lang="en-US" smtClean="0"/>
-              <a:t>Second level</a:t>
-            </a:r>
-          </a:p>
-          <a:p>
-            <a:pPr lvl="2"/>
-            <a:r>
-              <a:rPr lang="en-US" smtClean="0"/>
-              <a:t>Third level</a:t>
-            </a:r>
-          </a:p>
-          <a:p>
-            <a:pPr lvl="3"/>
-            <a:r>
-              <a:rPr lang="en-US" smtClean="0"/>
-              <a:t>Fourth level</a:t>
-            </a:r>
-          </a:p>
-          <a:p>
-            <a:pPr lvl="4"/>
-            <a:r>
-              <a:rPr lang="en-US" smtClean="0"/>
-              <a:t>Fifth level</a:t>
-            </a:r>
-            <a:endParaRPr lang="en-US"/>
-          </a:p>
-        </p:txBody>
-      </p:sp>
-      <p:sp>
-        <p:nvSpPr>
-          <p:cNvPr id="4" name="Date Placeholder 3"/>
-          <p:cNvSpPr>
-            <a:spLocks noGrp="1"/>
-          </p:cNvSpPr>
-          <p:nvPr>
-            <p:ph type="dt" sz="half" idx="10"/>
-          </p:nvPr>
-        </p:nvSpPr>
-        <p:spPr/>
-        <p:txBody>
-          <a:bodyPr/>
-          <a:lstStyle/>
-          <a:p>
-            <a:fld id="{5BCAD085-E8A6-8845-BD4E-CB4CCA059FC4}" type="datetimeFigureOut">
-              <a:rPr lang="en-US" smtClean="0"/>
-              <a:t>1/27/13</a:t>
+              <a:t>8/14/2021</a:t>
             </a:fld>
             <a:endParaRPr lang="en-US"/>
           </a:p>
@@ -816,7 +882,13 @@
       </p:sp>
       <p:sp>
         <p:nvSpPr>
-          <p:cNvPr id="5" name="Footer Placeholder 4"/>
+          <p:cNvPr id="5" name="Footer Placeholder 4">
+            <a:extLst>
+              <a:ext uri="{FF2B5EF4-FFF2-40B4-BE49-F238E27FC236}">
+                <a16:creationId xmlns:a16="http://schemas.microsoft.com/office/drawing/2014/main" id="{D0489374-CC78-4A34-8664-4B5551BC2D15}"/>
+              </a:ext>
+            </a:extLst>
+          </p:cNvPr>
           <p:cNvSpPr>
             <a:spLocks noGrp="1"/>
           </p:cNvSpPr>
@@ -835,7 +907,13 @@
       </p:sp>
       <p:sp>
         <p:nvSpPr>
-          <p:cNvPr id="6" name="Slide Number Placeholder 5"/>
+          <p:cNvPr id="6" name="Slide Number Placeholder 5">
+            <a:extLst>
+              <a:ext uri="{FF2B5EF4-FFF2-40B4-BE49-F238E27FC236}">
+                <a16:creationId xmlns:a16="http://schemas.microsoft.com/office/drawing/2014/main" id="{8D75147E-F167-469D-B187-B0A42E6AC299}"/>
+              </a:ext>
+            </a:extLst>
+          </p:cNvPr>
           <p:cNvSpPr>
             <a:spLocks noGrp="1"/>
           </p:cNvSpPr>
@@ -848,7 +926,7 @@
           <a:bodyPr/>
           <a:lstStyle/>
           <a:p>
-            <a:fld id="{C1FF6DA9-008F-8B48-92A6-B652298478BF}" type="slidenum">
+            <a:fld id="{6357C050-2BB0-42CB-AF71-1035C47D7F82}" type="slidenum">
               <a:rPr lang="en-US" smtClean="0"/>
               <a:t>‹#›</a:t>
             </a:fld>
@@ -859,7 +937,7 @@
     </p:spTree>
     <p:extLst>
       <p:ext uri="{BB962C8B-B14F-4D97-AF65-F5344CB8AC3E}">
-        <p14:creationId xmlns:p14="http://schemas.microsoft.com/office/powerpoint/2010/main" val="2614314258"/>
+        <p14:creationId xmlns:p14="http://schemas.microsoft.com/office/powerpoint/2010/main" val="1128426886"/>
       </p:ext>
     </p:extLst>
   </p:cSld>
@@ -888,7 +966,13 @@
       </p:grpSpPr>
       <p:sp>
         <p:nvSpPr>
-          <p:cNvPr id="2" name="Title 1"/>
+          <p:cNvPr id="2" name="Title 1">
+            <a:extLst>
+              <a:ext uri="{FF2B5EF4-FFF2-40B4-BE49-F238E27FC236}">
+                <a16:creationId xmlns:a16="http://schemas.microsoft.com/office/drawing/2014/main" id="{05685143-DA60-43DD-82D7-67D0C17457E0}"/>
+              </a:ext>
+            </a:extLst>
+          </p:cNvPr>
           <p:cNvSpPr>
             <a:spLocks noGrp="1"/>
           </p:cNvSpPr>
@@ -898,29 +982,34 @@
         </p:nvSpPr>
         <p:spPr>
           <a:xfrm>
-            <a:off x="722313" y="4406900"/>
-            <a:ext cx="7772400" cy="1362075"/>
+            <a:off x="831850" y="1709738"/>
+            <a:ext cx="10515600" cy="2852737"/>
           </a:xfrm>
         </p:spPr>
         <p:txBody>
-          <a:bodyPr anchor="t"/>
+          <a:bodyPr anchor="b"/>
           <a:lstStyle>
-            <a:lvl1pPr algn="l">
-              <a:defRPr sz="4000" b="1" cap="all"/>
+            <a:lvl1pPr>
+              <a:defRPr sz="6000"/>
             </a:lvl1pPr>
           </a:lstStyle>
           <a:p>
             <a:r>
-              <a:rPr lang="en-US" smtClean="0"/>
+              <a:rPr lang="en-US"/>
               <a:t>Click to edit Master title style</a:t>
             </a:r>
-            <a:endParaRPr lang="en-US"/>
-          </a:p>
-        </p:txBody>
-      </p:sp>
-      <p:sp>
-        <p:nvSpPr>
-          <p:cNvPr id="3" name="Text Placeholder 2"/>
+          </a:p>
+        </p:txBody>
+      </p:sp>
+      <p:sp>
+        <p:nvSpPr>
+          <p:cNvPr id="3" name="Text Placeholder 2">
+            <a:extLst>
+              <a:ext uri="{FF2B5EF4-FFF2-40B4-BE49-F238E27FC236}">
+                <a16:creationId xmlns:a16="http://schemas.microsoft.com/office/drawing/2014/main" id="{B93FB4E8-CF2E-42C1-97D9-81234A6DF7A8}"/>
+              </a:ext>
+            </a:extLst>
+          </p:cNvPr>
           <p:cNvSpPr>
             <a:spLocks noGrp="1"/>
           </p:cNvSpPr>
@@ -930,16 +1019,16 @@
         </p:nvSpPr>
         <p:spPr>
           <a:xfrm>
-            <a:off x="722313" y="2906713"/>
-            <a:ext cx="7772400" cy="1500187"/>
+            <a:off x="831850" y="4589463"/>
+            <a:ext cx="10515600" cy="1500187"/>
           </a:xfrm>
         </p:spPr>
         <p:txBody>
-          <a:bodyPr anchor="b"/>
+          <a:bodyPr/>
           <a:lstStyle>
             <a:lvl1pPr marL="0" indent="0">
               <a:buNone/>
-              <a:defRPr sz="2000">
+              <a:defRPr sz="2400">
                 <a:solidFill>
                   <a:schemeClr val="tx1">
                     <a:tint val="75000"/>
@@ -949,7 +1038,7 @@
             </a:lvl1pPr>
             <a:lvl2pPr marL="457200" indent="0">
               <a:buNone/>
-              <a:defRPr sz="1800">
+              <a:defRPr sz="2000">
                 <a:solidFill>
                   <a:schemeClr val="tx1">
                     <a:tint val="75000"/>
@@ -959,7 +1048,7 @@
             </a:lvl2pPr>
             <a:lvl3pPr marL="914400" indent="0">
               <a:buNone/>
-              <a:defRPr sz="1600">
+              <a:defRPr sz="1800">
                 <a:solidFill>
                   <a:schemeClr val="tx1">
                     <a:tint val="75000"/>
@@ -969,7 +1058,7 @@
             </a:lvl3pPr>
             <a:lvl4pPr marL="1371600" indent="0">
               <a:buNone/>
-              <a:defRPr sz="1400">
+              <a:defRPr sz="1600">
                 <a:solidFill>
                   <a:schemeClr val="tx1">
                     <a:tint val="75000"/>
@@ -979,7 +1068,7 @@
             </a:lvl4pPr>
             <a:lvl5pPr marL="1828800" indent="0">
               <a:buNone/>
-              <a:defRPr sz="1400">
+              <a:defRPr sz="1600">
                 <a:solidFill>
                   <a:schemeClr val="tx1">
                     <a:tint val="75000"/>
@@ -989,7 +1078,7 @@
             </a:lvl5pPr>
             <a:lvl6pPr marL="2286000" indent="0">
               <a:buNone/>
-              <a:defRPr sz="1400">
+              <a:defRPr sz="1600">
                 <a:solidFill>
                   <a:schemeClr val="tx1">
                     <a:tint val="75000"/>
@@ -999,7 +1088,7 @@
             </a:lvl6pPr>
             <a:lvl7pPr marL="2743200" indent="0">
               <a:buNone/>
-              <a:defRPr sz="1400">
+              <a:defRPr sz="1600">
                 <a:solidFill>
                   <a:schemeClr val="tx1">
                     <a:tint val="75000"/>
@@ -1009,7 +1098,7 @@
             </a:lvl7pPr>
             <a:lvl8pPr marL="3200400" indent="0">
               <a:buNone/>
-              <a:defRPr sz="1400">
+              <a:defRPr sz="1600">
                 <a:solidFill>
                   <a:schemeClr val="tx1">
                     <a:tint val="75000"/>
@@ -1019,7 +1108,7 @@
             </a:lvl8pPr>
             <a:lvl9pPr marL="3657600" indent="0">
               <a:buNone/>
-              <a:defRPr sz="1400">
+              <a:defRPr sz="1600">
                 <a:solidFill>
                   <a:schemeClr val="tx1">
                     <a:tint val="75000"/>
@@ -1031,30 +1120,36 @@
           <a:p>
             <a:pPr lvl="0"/>
             <a:r>
+              <a:rPr lang="en-US"/>
+              <a:t>Click to edit Master text styles</a:t>
+            </a:r>
+          </a:p>
+        </p:txBody>
+      </p:sp>
+      <p:sp>
+        <p:nvSpPr>
+          <p:cNvPr id="4" name="Date Placeholder 3">
+            <a:extLst>
+              <a:ext uri="{FF2B5EF4-FFF2-40B4-BE49-F238E27FC236}">
+                <a16:creationId xmlns:a16="http://schemas.microsoft.com/office/drawing/2014/main" id="{A97DEBDE-2FB3-44F6-9F50-955A2D1455B1}"/>
+              </a:ext>
+            </a:extLst>
+          </p:cNvPr>
+          <p:cNvSpPr>
+            <a:spLocks noGrp="1"/>
+          </p:cNvSpPr>
+          <p:nvPr>
+            <p:ph type="dt" sz="half" idx="10"/>
+          </p:nvPr>
+        </p:nvSpPr>
+        <p:spPr/>
+        <p:txBody>
+          <a:bodyPr/>
+          <a:lstStyle/>
+          <a:p>
+            <a:fld id="{6F3F5EC3-68B3-43B2-9B30-E347987FCF54}" type="datetimeFigureOut">
               <a:rPr lang="en-US" smtClean="0"/>
-              <a:t>Click to edit Master text styles</a:t>
-            </a:r>
-          </a:p>
-        </p:txBody>
-      </p:sp>
-      <p:sp>
-        <p:nvSpPr>
-          <p:cNvPr id="4" name="Date Placeholder 3"/>
-          <p:cNvSpPr>
-            <a:spLocks noGrp="1"/>
-          </p:cNvSpPr>
-          <p:nvPr>
-            <p:ph type="dt" sz="half" idx="10"/>
-          </p:nvPr>
-        </p:nvSpPr>
-        <p:spPr/>
-        <p:txBody>
-          <a:bodyPr/>
-          <a:lstStyle/>
-          <a:p>
-            <a:fld id="{5BCAD085-E8A6-8845-BD4E-CB4CCA059FC4}" type="datetimeFigureOut">
-              <a:rPr lang="en-US" smtClean="0"/>
-              <a:t>1/27/13</a:t>
+              <a:t>8/14/2021</a:t>
             </a:fld>
             <a:endParaRPr lang="en-US"/>
           </a:p>
@@ -1062,7 +1157,13 @@
       </p:sp>
       <p:sp>
         <p:nvSpPr>
-          <p:cNvPr id="5" name="Footer Placeholder 4"/>
+          <p:cNvPr id="5" name="Footer Placeholder 4">
+            <a:extLst>
+              <a:ext uri="{FF2B5EF4-FFF2-40B4-BE49-F238E27FC236}">
+                <a16:creationId xmlns:a16="http://schemas.microsoft.com/office/drawing/2014/main" id="{69A96984-19C6-4A1E-B33B-201638CF03D2}"/>
+              </a:ext>
+            </a:extLst>
+          </p:cNvPr>
           <p:cNvSpPr>
             <a:spLocks noGrp="1"/>
           </p:cNvSpPr>
@@ -1081,7 +1182,13 @@
       </p:sp>
       <p:sp>
         <p:nvSpPr>
-          <p:cNvPr id="6" name="Slide Number Placeholder 5"/>
+          <p:cNvPr id="6" name="Slide Number Placeholder 5">
+            <a:extLst>
+              <a:ext uri="{FF2B5EF4-FFF2-40B4-BE49-F238E27FC236}">
+                <a16:creationId xmlns:a16="http://schemas.microsoft.com/office/drawing/2014/main" id="{02C721FE-44EA-4C5B-9AFA-A3977352C460}"/>
+              </a:ext>
+            </a:extLst>
+          </p:cNvPr>
           <p:cNvSpPr>
             <a:spLocks noGrp="1"/>
           </p:cNvSpPr>
@@ -1094,7 +1201,7 @@
           <a:bodyPr/>
           <a:lstStyle/>
           <a:p>
-            <a:fld id="{C1FF6DA9-008F-8B48-92A6-B652298478BF}" type="slidenum">
+            <a:fld id="{6357C050-2BB0-42CB-AF71-1035C47D7F82}" type="slidenum">
               <a:rPr lang="en-US" smtClean="0"/>
               <a:t>‹#›</a:t>
             </a:fld>
@@ -1105,7 +1212,7 @@
     </p:spTree>
     <p:extLst>
       <p:ext uri="{BB962C8B-B14F-4D97-AF65-F5344CB8AC3E}">
-        <p14:creationId xmlns:p14="http://schemas.microsoft.com/office/powerpoint/2010/main" val="960648375"/>
+        <p14:creationId xmlns:p14="http://schemas.microsoft.com/office/powerpoint/2010/main" val="1552308027"/>
       </p:ext>
     </p:extLst>
   </p:cSld>
@@ -1134,7 +1241,13 @@
       </p:grpSpPr>
       <p:sp>
         <p:nvSpPr>
-          <p:cNvPr id="2" name="Title 1"/>
+          <p:cNvPr id="2" name="Title 1">
+            <a:extLst>
+              <a:ext uri="{FF2B5EF4-FFF2-40B4-BE49-F238E27FC236}">
+                <a16:creationId xmlns:a16="http://schemas.microsoft.com/office/drawing/2014/main" id="{58A8CD95-767B-47A8-9CF1-1CF67D046BBC}"/>
+              </a:ext>
+            </a:extLst>
+          </p:cNvPr>
           <p:cNvSpPr>
             <a:spLocks noGrp="1"/>
           </p:cNvSpPr>
@@ -1148,16 +1261,21 @@
           <a:lstStyle/>
           <a:p>
             <a:r>
-              <a:rPr lang="en-US" smtClean="0"/>
+              <a:rPr lang="en-US"/>
               <a:t>Click to edit Master title style</a:t>
             </a:r>
-            <a:endParaRPr lang="en-US"/>
-          </a:p>
-        </p:txBody>
-      </p:sp>
-      <p:sp>
-        <p:nvSpPr>
-          <p:cNvPr id="3" name="Content Placeholder 2"/>
+          </a:p>
+        </p:txBody>
+      </p:sp>
+      <p:sp>
+        <p:nvSpPr>
+          <p:cNvPr id="3" name="Content Placeholder 2">
+            <a:extLst>
+              <a:ext uri="{FF2B5EF4-FFF2-40B4-BE49-F238E27FC236}">
+                <a16:creationId xmlns:a16="http://schemas.microsoft.com/office/drawing/2014/main" id="{B6FB2E40-EAFD-4CCC-9D93-65A2CAD6F5BA}"/>
+              </a:ext>
+            </a:extLst>
+          </p:cNvPr>
           <p:cNvSpPr>
             <a:spLocks noGrp="1"/>
           </p:cNvSpPr>
@@ -1167,82 +1285,59 @@
         </p:nvSpPr>
         <p:spPr>
           <a:xfrm>
-            <a:off x="457200" y="1600200"/>
-            <a:ext cx="4038600" cy="4525963"/>
+            <a:off x="838200" y="1825625"/>
+            <a:ext cx="5181600" cy="4351338"/>
           </a:xfrm>
         </p:spPr>
         <p:txBody>
           <a:bodyPr/>
-          <a:lstStyle>
-            <a:lvl1pPr>
-              <a:defRPr sz="2800"/>
-            </a:lvl1pPr>
-            <a:lvl2pPr>
-              <a:defRPr sz="2400"/>
-            </a:lvl2pPr>
-            <a:lvl3pPr>
-              <a:defRPr sz="2000"/>
-            </a:lvl3pPr>
-            <a:lvl4pPr>
-              <a:defRPr sz="1800"/>
-            </a:lvl4pPr>
-            <a:lvl5pPr>
-              <a:defRPr sz="1800"/>
-            </a:lvl5pPr>
-            <a:lvl6pPr>
-              <a:defRPr sz="1800"/>
-            </a:lvl6pPr>
-            <a:lvl7pPr>
-              <a:defRPr sz="1800"/>
-            </a:lvl7pPr>
-            <a:lvl8pPr>
-              <a:defRPr sz="1800"/>
-            </a:lvl8pPr>
-            <a:lvl9pPr>
-              <a:defRPr sz="1800"/>
-            </a:lvl9pPr>
-          </a:lstStyle>
+          <a:lstStyle/>
           <a:p>
             <a:pPr lvl="0"/>
             <a:r>
-              <a:rPr lang="en-US" smtClean="0"/>
+              <a:rPr lang="en-US"/>
               <a:t>Click to edit Master text styles</a:t>
             </a:r>
           </a:p>
           <a:p>
             <a:pPr lvl="1"/>
             <a:r>
-              <a:rPr lang="en-US" smtClean="0"/>
+              <a:rPr lang="en-US"/>
               <a:t>Second level</a:t>
             </a:r>
           </a:p>
           <a:p>
             <a:pPr lvl="2"/>
             <a:r>
-              <a:rPr lang="en-US" smtClean="0"/>
+              <a:rPr lang="en-US"/>
               <a:t>Third level</a:t>
             </a:r>
           </a:p>
           <a:p>
             <a:pPr lvl="3"/>
             <a:r>
-              <a:rPr lang="en-US" smtClean="0"/>
+              <a:rPr lang="en-US"/>
               <a:t>Fourth level</a:t>
             </a:r>
           </a:p>
           <a:p>
             <a:pPr lvl="4"/>
             <a:r>
-              <a:rPr lang="en-US" smtClean="0"/>
+              <a:rPr lang="en-US"/>
               <a:t>Fifth level</a:t>
             </a:r>
-            <a:endParaRPr lang="en-US"/>
-          </a:p>
-        </p:txBody>
-      </p:sp>
-      <p:sp>
-        <p:nvSpPr>
-          <p:cNvPr id="4" name="Content Placeholder 3"/>
+          </a:p>
+        </p:txBody>
+      </p:sp>
+      <p:sp>
+        <p:nvSpPr>
+          <p:cNvPr id="4" name="Content Placeholder 3">
+            <a:extLst>
+              <a:ext uri="{FF2B5EF4-FFF2-40B4-BE49-F238E27FC236}">
+                <a16:creationId xmlns:a16="http://schemas.microsoft.com/office/drawing/2014/main" id="{F61B2169-0EBF-4A2C-A1A6-21E7818C23C0}"/>
+              </a:ext>
+            </a:extLst>
+          </p:cNvPr>
           <p:cNvSpPr>
             <a:spLocks noGrp="1"/>
           </p:cNvSpPr>
@@ -1252,97 +1347,74 @@
         </p:nvSpPr>
         <p:spPr>
           <a:xfrm>
-            <a:off x="4648200" y="1600200"/>
-            <a:ext cx="4038600" cy="4525963"/>
+            <a:off x="6172200" y="1825625"/>
+            <a:ext cx="5181600" cy="4351338"/>
           </a:xfrm>
         </p:spPr>
         <p:txBody>
           <a:bodyPr/>
-          <a:lstStyle>
-            <a:lvl1pPr>
-              <a:defRPr sz="2800"/>
-            </a:lvl1pPr>
-            <a:lvl2pPr>
-              <a:defRPr sz="2400"/>
-            </a:lvl2pPr>
-            <a:lvl3pPr>
-              <a:defRPr sz="2000"/>
-            </a:lvl3pPr>
-            <a:lvl4pPr>
-              <a:defRPr sz="1800"/>
-            </a:lvl4pPr>
-            <a:lvl5pPr>
-              <a:defRPr sz="1800"/>
-            </a:lvl5pPr>
-            <a:lvl6pPr>
-              <a:defRPr sz="1800"/>
-            </a:lvl6pPr>
-            <a:lvl7pPr>
-              <a:defRPr sz="1800"/>
-            </a:lvl7pPr>
-            <a:lvl8pPr>
-              <a:defRPr sz="1800"/>
-            </a:lvl8pPr>
-            <a:lvl9pPr>
-              <a:defRPr sz="1800"/>
-            </a:lvl9pPr>
-          </a:lstStyle>
+          <a:lstStyle/>
           <a:p>
             <a:pPr lvl="0"/>
             <a:r>
+              <a:rPr lang="en-US"/>
+              <a:t>Click to edit Master text styles</a:t>
+            </a:r>
+          </a:p>
+          <a:p>
+            <a:pPr lvl="1"/>
+            <a:r>
+              <a:rPr lang="en-US"/>
+              <a:t>Second level</a:t>
+            </a:r>
+          </a:p>
+          <a:p>
+            <a:pPr lvl="2"/>
+            <a:r>
+              <a:rPr lang="en-US"/>
+              <a:t>Third level</a:t>
+            </a:r>
+          </a:p>
+          <a:p>
+            <a:pPr lvl="3"/>
+            <a:r>
+              <a:rPr lang="en-US"/>
+              <a:t>Fourth level</a:t>
+            </a:r>
+          </a:p>
+          <a:p>
+            <a:pPr lvl="4"/>
+            <a:r>
+              <a:rPr lang="en-US"/>
+              <a:t>Fifth level</a:t>
+            </a:r>
+          </a:p>
+        </p:txBody>
+      </p:sp>
+      <p:sp>
+        <p:nvSpPr>
+          <p:cNvPr id="5" name="Date Placeholder 4">
+            <a:extLst>
+              <a:ext uri="{FF2B5EF4-FFF2-40B4-BE49-F238E27FC236}">
+                <a16:creationId xmlns:a16="http://schemas.microsoft.com/office/drawing/2014/main" id="{AD0147C8-C25A-40A3-9FB0-6BCCB675A254}"/>
+              </a:ext>
+            </a:extLst>
+          </p:cNvPr>
+          <p:cNvSpPr>
+            <a:spLocks noGrp="1"/>
+          </p:cNvSpPr>
+          <p:nvPr>
+            <p:ph type="dt" sz="half" idx="10"/>
+          </p:nvPr>
+        </p:nvSpPr>
+        <p:spPr/>
+        <p:txBody>
+          <a:bodyPr/>
+          <a:lstStyle/>
+          <a:p>
+            <a:fld id="{6F3F5EC3-68B3-43B2-9B30-E347987FCF54}" type="datetimeFigureOut">
               <a:rPr lang="en-US" smtClean="0"/>
-              <a:t>Click to edit Master text styles</a:t>
-            </a:r>
-          </a:p>
-          <a:p>
-            <a:pPr lvl="1"/>
-            <a:r>
-              <a:rPr lang="en-US" smtClean="0"/>
-              <a:t>Second level</a:t>
-            </a:r>
-          </a:p>
-          <a:p>
-            <a:pPr lvl="2"/>
-            <a:r>
-              <a:rPr lang="en-US" smtClean="0"/>
-              <a:t>Third level</a:t>
-            </a:r>
-          </a:p>
-          <a:p>
-            <a:pPr lvl="3"/>
-            <a:r>
-              <a:rPr lang="en-US" smtClean="0"/>
-              <a:t>Fourth level</a:t>
-            </a:r>
-          </a:p>
-          <a:p>
-            <a:pPr lvl="4"/>
-            <a:r>
-              <a:rPr lang="en-US" smtClean="0"/>
-              <a:t>Fifth level</a:t>
-            </a:r>
-            <a:endParaRPr lang="en-US"/>
-          </a:p>
-        </p:txBody>
-      </p:sp>
-      <p:sp>
-        <p:nvSpPr>
-          <p:cNvPr id="5" name="Date Placeholder 4"/>
-          <p:cNvSpPr>
-            <a:spLocks noGrp="1"/>
-          </p:cNvSpPr>
-          <p:nvPr>
-            <p:ph type="dt" sz="half" idx="10"/>
-          </p:nvPr>
-        </p:nvSpPr>
-        <p:spPr/>
-        <p:txBody>
-          <a:bodyPr/>
-          <a:lstStyle/>
-          <a:p>
-            <a:fld id="{5BCAD085-E8A6-8845-BD4E-CB4CCA059FC4}" type="datetimeFigureOut">
-              <a:rPr lang="en-US" smtClean="0"/>
-              <a:t>1/27/13</a:t>
+              <a:t>8/14/2021</a:t>
             </a:fld>
             <a:endParaRPr lang="en-US"/>
           </a:p>
@@ -1350,7 +1422,13 @@
       </p:sp>
       <p:sp>
         <p:nvSpPr>
-          <p:cNvPr id="6" name="Footer Placeholder 5"/>
+          <p:cNvPr id="6" name="Footer Placeholder 5">
+            <a:extLst>
+              <a:ext uri="{FF2B5EF4-FFF2-40B4-BE49-F238E27FC236}">
+                <a16:creationId xmlns:a16="http://schemas.microsoft.com/office/drawing/2014/main" id="{696649D8-B8FD-4A90-8981-00CF9582B21C}"/>
+              </a:ext>
+            </a:extLst>
+          </p:cNvPr>
           <p:cNvSpPr>
             <a:spLocks noGrp="1"/>
           </p:cNvSpPr>
@@ -1369,7 +1447,13 @@
       </p:sp>
       <p:sp>
         <p:nvSpPr>
-          <p:cNvPr id="7" name="Slide Number Placeholder 6"/>
+          <p:cNvPr id="7" name="Slide Number Placeholder 6">
+            <a:extLst>
+              <a:ext uri="{FF2B5EF4-FFF2-40B4-BE49-F238E27FC236}">
+                <a16:creationId xmlns:a16="http://schemas.microsoft.com/office/drawing/2014/main" id="{53DAB9BD-67B2-4011-AC9E-ECC8CC056696}"/>
+              </a:ext>
+            </a:extLst>
+          </p:cNvPr>
           <p:cNvSpPr>
             <a:spLocks noGrp="1"/>
           </p:cNvSpPr>
@@ -1382,7 +1466,7 @@
           <a:bodyPr/>
           <a:lstStyle/>
           <a:p>
-            <a:fld id="{C1FF6DA9-008F-8B48-92A6-B652298478BF}" type="slidenum">
+            <a:fld id="{6357C050-2BB0-42CB-AF71-1035C47D7F82}" type="slidenum">
               <a:rPr lang="en-US" smtClean="0"/>
               <a:t>‹#›</a:t>
             </a:fld>
@@ -1393,7 +1477,7 @@
     </p:spTree>
     <p:extLst>
       <p:ext uri="{BB962C8B-B14F-4D97-AF65-F5344CB8AC3E}">
-        <p14:creationId xmlns:p14="http://schemas.microsoft.com/office/powerpoint/2010/main" val="2782244947"/>
+        <p14:creationId xmlns:p14="http://schemas.microsoft.com/office/powerpoint/2010/main" val="3075486128"/>
       </p:ext>
     </p:extLst>
   </p:cSld>
@@ -1422,45 +1506,57 @@
       </p:grpSpPr>
       <p:sp>
         <p:nvSpPr>
-          <p:cNvPr id="2" name="Title 1"/>
+          <p:cNvPr id="2" name="Title 1">
+            <a:extLst>
+              <a:ext uri="{FF2B5EF4-FFF2-40B4-BE49-F238E27FC236}">
+                <a16:creationId xmlns:a16="http://schemas.microsoft.com/office/drawing/2014/main" id="{4F480A71-437E-4E74-B52C-07C9457B7F9E}"/>
+              </a:ext>
+            </a:extLst>
+          </p:cNvPr>
           <p:cNvSpPr>
             <a:spLocks noGrp="1"/>
           </p:cNvSpPr>
           <p:nvPr>
             <p:ph type="title"/>
-          </p:nvPr>
-        </p:nvSpPr>
-        <p:spPr/>
-        <p:txBody>
-          <a:bodyPr/>
-          <a:lstStyle>
-            <a:lvl1pPr>
-              <a:defRPr/>
-            </a:lvl1pPr>
-          </a:lstStyle>
-          <a:p>
-            <a:r>
-              <a:rPr lang="en-US" smtClean="0"/>
-              <a:t>Click to edit Master title style</a:t>
-            </a:r>
-            <a:endParaRPr lang="en-US"/>
-          </a:p>
-        </p:txBody>
-      </p:sp>
-      <p:sp>
-        <p:nvSpPr>
-          <p:cNvPr id="3" name="Text Placeholder 2"/>
-          <p:cNvSpPr>
-            <a:spLocks noGrp="1"/>
-          </p:cNvSpPr>
-          <p:nvPr>
-            <p:ph type="body" idx="1"/>
           </p:nvPr>
         </p:nvSpPr>
         <p:spPr>
           <a:xfrm>
-            <a:off x="457200" y="1535113"/>
-            <a:ext cx="4040188" cy="639762"/>
+            <a:off x="839788" y="365125"/>
+            <a:ext cx="10515600" cy="1325563"/>
+          </a:xfrm>
+        </p:spPr>
+        <p:txBody>
+          <a:bodyPr/>
+          <a:lstStyle/>
+          <a:p>
+            <a:r>
+              <a:rPr lang="en-US"/>
+              <a:t>Click to edit Master title style</a:t>
+            </a:r>
+          </a:p>
+        </p:txBody>
+      </p:sp>
+      <p:sp>
+        <p:nvSpPr>
+          <p:cNvPr id="3" name="Text Placeholder 2">
+            <a:extLst>
+              <a:ext uri="{FF2B5EF4-FFF2-40B4-BE49-F238E27FC236}">
+                <a16:creationId xmlns:a16="http://schemas.microsoft.com/office/drawing/2014/main" id="{B7D5C7F5-6DAC-4149-AEE6-ED45653B1424}"/>
+              </a:ext>
+            </a:extLst>
+          </p:cNvPr>
+          <p:cNvSpPr>
+            <a:spLocks noGrp="1"/>
+          </p:cNvSpPr>
+          <p:nvPr>
+            <p:ph type="body" idx="1"/>
+          </p:nvPr>
+        </p:nvSpPr>
+        <p:spPr>
+          <a:xfrm>
+            <a:off x="839788" y="1681163"/>
+            <a:ext cx="5157787" cy="823912"/>
           </a:xfrm>
         </p:spPr>
         <p:txBody>
@@ -1506,7 +1602,7 @@
           <a:p>
             <a:pPr lvl="0"/>
             <a:r>
-              <a:rPr lang="en-US" smtClean="0"/>
+              <a:rPr lang="en-US"/>
               <a:t>Click to edit Master text styles</a:t>
             </a:r>
           </a:p>
@@ -1514,7 +1610,13 @@
       </p:sp>
       <p:sp>
         <p:nvSpPr>
-          <p:cNvPr id="4" name="Content Placeholder 3"/>
+          <p:cNvPr id="4" name="Content Placeholder 3">
+            <a:extLst>
+              <a:ext uri="{FF2B5EF4-FFF2-40B4-BE49-F238E27FC236}">
+                <a16:creationId xmlns:a16="http://schemas.microsoft.com/office/drawing/2014/main" id="{C4EA7428-1992-4BBC-9C16-9A89583E928D}"/>
+              </a:ext>
+            </a:extLst>
+          </p:cNvPr>
           <p:cNvSpPr>
             <a:spLocks noGrp="1"/>
           </p:cNvSpPr>
@@ -1524,82 +1626,59 @@
         </p:nvSpPr>
         <p:spPr>
           <a:xfrm>
-            <a:off x="457200" y="2174875"/>
-            <a:ext cx="4040188" cy="3951288"/>
+            <a:off x="839788" y="2505075"/>
+            <a:ext cx="5157787" cy="3684588"/>
           </a:xfrm>
         </p:spPr>
         <p:txBody>
           <a:bodyPr/>
-          <a:lstStyle>
-            <a:lvl1pPr>
-              <a:defRPr sz="2400"/>
-            </a:lvl1pPr>
-            <a:lvl2pPr>
-              <a:defRPr sz="2000"/>
-            </a:lvl2pPr>
-            <a:lvl3pPr>
-              <a:defRPr sz="1800"/>
-            </a:lvl3pPr>
-            <a:lvl4pPr>
-              <a:defRPr sz="1600"/>
-            </a:lvl4pPr>
-            <a:lvl5pPr>
-              <a:defRPr sz="1600"/>
-            </a:lvl5pPr>
-            <a:lvl6pPr>
-              <a:defRPr sz="1600"/>
-            </a:lvl6pPr>
-            <a:lvl7pPr>
-              <a:defRPr sz="1600"/>
-            </a:lvl7pPr>
-            <a:lvl8pPr>
-              <a:defRPr sz="1600"/>
-            </a:lvl8pPr>
-            <a:lvl9pPr>
-              <a:defRPr sz="1600"/>
-            </a:lvl9pPr>
-          </a:lstStyle>
+          <a:lstStyle/>
           <a:p>
             <a:pPr lvl="0"/>
             <a:r>
-              <a:rPr lang="en-US" smtClean="0"/>
+              <a:rPr lang="en-US"/>
               <a:t>Click to edit Master text styles</a:t>
             </a:r>
           </a:p>
           <a:p>
             <a:pPr lvl="1"/>
             <a:r>
-              <a:rPr lang="en-US" smtClean="0"/>
+              <a:rPr lang="en-US"/>
               <a:t>Second level</a:t>
             </a:r>
           </a:p>
           <a:p>
             <a:pPr lvl="2"/>
             <a:r>
-              <a:rPr lang="en-US" smtClean="0"/>
+              <a:rPr lang="en-US"/>
               <a:t>Third level</a:t>
             </a:r>
           </a:p>
           <a:p>
             <a:pPr lvl="3"/>
             <a:r>
-              <a:rPr lang="en-US" smtClean="0"/>
+              <a:rPr lang="en-US"/>
               <a:t>Fourth level</a:t>
             </a:r>
           </a:p>
           <a:p>
             <a:pPr lvl="4"/>
             <a:r>
-              <a:rPr lang="en-US" smtClean="0"/>
+              <a:rPr lang="en-US"/>
               <a:t>Fifth level</a:t>
             </a:r>
-            <a:endParaRPr lang="en-US"/>
-          </a:p>
-        </p:txBody>
-      </p:sp>
-      <p:sp>
-        <p:nvSpPr>
-          <p:cNvPr id="5" name="Text Placeholder 4"/>
+          </a:p>
+        </p:txBody>
+      </p:sp>
+      <p:sp>
+        <p:nvSpPr>
+          <p:cNvPr id="5" name="Text Placeholder 4">
+            <a:extLst>
+              <a:ext uri="{FF2B5EF4-FFF2-40B4-BE49-F238E27FC236}">
+                <a16:creationId xmlns:a16="http://schemas.microsoft.com/office/drawing/2014/main" id="{05225C98-89BE-40DD-A1ED-A3FEA4C1B87A}"/>
+              </a:ext>
+            </a:extLst>
+          </p:cNvPr>
           <p:cNvSpPr>
             <a:spLocks noGrp="1"/>
           </p:cNvSpPr>
@@ -1609,8 +1688,8 @@
         </p:nvSpPr>
         <p:spPr>
           <a:xfrm>
-            <a:off x="4645025" y="1535113"/>
-            <a:ext cx="4041775" cy="639762"/>
+            <a:off x="6172200" y="1681163"/>
+            <a:ext cx="5183188" cy="823912"/>
           </a:xfrm>
         </p:spPr>
         <p:txBody>
@@ -1656,7 +1735,7 @@
           <a:p>
             <a:pPr lvl="0"/>
             <a:r>
-              <a:rPr lang="en-US" smtClean="0"/>
+              <a:rPr lang="en-US"/>
               <a:t>Click to edit Master text styles</a:t>
             </a:r>
           </a:p>
@@ -1664,7 +1743,13 @@
       </p:sp>
       <p:sp>
         <p:nvSpPr>
-          <p:cNvPr id="6" name="Content Placeholder 5"/>
+          <p:cNvPr id="6" name="Content Placeholder 5">
+            <a:extLst>
+              <a:ext uri="{FF2B5EF4-FFF2-40B4-BE49-F238E27FC236}">
+                <a16:creationId xmlns:a16="http://schemas.microsoft.com/office/drawing/2014/main" id="{883DDBA2-8152-4868-B773-D72744AD101D}"/>
+              </a:ext>
+            </a:extLst>
+          </p:cNvPr>
           <p:cNvSpPr>
             <a:spLocks noGrp="1"/>
           </p:cNvSpPr>
@@ -1674,97 +1759,74 @@
         </p:nvSpPr>
         <p:spPr>
           <a:xfrm>
-            <a:off x="4645025" y="2174875"/>
-            <a:ext cx="4041775" cy="3951288"/>
+            <a:off x="6172200" y="2505075"/>
+            <a:ext cx="5183188" cy="3684588"/>
           </a:xfrm>
         </p:spPr>
         <p:txBody>
           <a:bodyPr/>
-          <a:lstStyle>
-            <a:lvl1pPr>
-              <a:defRPr sz="2400"/>
-            </a:lvl1pPr>
-            <a:lvl2pPr>
-              <a:defRPr sz="2000"/>
-            </a:lvl2pPr>
-            <a:lvl3pPr>
-              <a:defRPr sz="1800"/>
-            </a:lvl3pPr>
-            <a:lvl4pPr>
-              <a:defRPr sz="1600"/>
-            </a:lvl4pPr>
-            <a:lvl5pPr>
-              <a:defRPr sz="1600"/>
-            </a:lvl5pPr>
-            <a:lvl6pPr>
-              <a:defRPr sz="1600"/>
-            </a:lvl6pPr>
-            <a:lvl7pPr>
-              <a:defRPr sz="1600"/>
-            </a:lvl7pPr>
-            <a:lvl8pPr>
-              <a:defRPr sz="1600"/>
-            </a:lvl8pPr>
-            <a:lvl9pPr>
-              <a:defRPr sz="1600"/>
-            </a:lvl9pPr>
-          </a:lstStyle>
+          <a:lstStyle/>
           <a:p>
             <a:pPr lvl="0"/>
             <a:r>
+              <a:rPr lang="en-US"/>
+              <a:t>Click to edit Master text styles</a:t>
+            </a:r>
+          </a:p>
+          <a:p>
+            <a:pPr lvl="1"/>
+            <a:r>
+              <a:rPr lang="en-US"/>
+              <a:t>Second level</a:t>
+            </a:r>
+          </a:p>
+          <a:p>
+            <a:pPr lvl="2"/>
+            <a:r>
+              <a:rPr lang="en-US"/>
+              <a:t>Third level</a:t>
+            </a:r>
+          </a:p>
+          <a:p>
+            <a:pPr lvl="3"/>
+            <a:r>
+              <a:rPr lang="en-US"/>
+              <a:t>Fourth level</a:t>
+            </a:r>
+          </a:p>
+          <a:p>
+            <a:pPr lvl="4"/>
+            <a:r>
+              <a:rPr lang="en-US"/>
+              <a:t>Fifth level</a:t>
+            </a:r>
+          </a:p>
+        </p:txBody>
+      </p:sp>
+      <p:sp>
+        <p:nvSpPr>
+          <p:cNvPr id="7" name="Date Placeholder 6">
+            <a:extLst>
+              <a:ext uri="{FF2B5EF4-FFF2-40B4-BE49-F238E27FC236}">
+                <a16:creationId xmlns:a16="http://schemas.microsoft.com/office/drawing/2014/main" id="{2E1D1FCF-96F5-44FB-8D2C-358CACFFE230}"/>
+              </a:ext>
+            </a:extLst>
+          </p:cNvPr>
+          <p:cNvSpPr>
+            <a:spLocks noGrp="1"/>
+          </p:cNvSpPr>
+          <p:nvPr>
+            <p:ph type="dt" sz="half" idx="10"/>
+          </p:nvPr>
+        </p:nvSpPr>
+        <p:spPr/>
+        <p:txBody>
+          <a:bodyPr/>
+          <a:lstStyle/>
+          <a:p>
+            <a:fld id="{6F3F5EC3-68B3-43B2-9B30-E347987FCF54}" type="datetimeFigureOut">
               <a:rPr lang="en-US" smtClean="0"/>
-              <a:t>Click to edit Master text styles</a:t>
-            </a:r>
-          </a:p>
-          <a:p>
-            <a:pPr lvl="1"/>
-            <a:r>
-              <a:rPr lang="en-US" smtClean="0"/>
-              <a:t>Second level</a:t>
-            </a:r>
-          </a:p>
-          <a:p>
-            <a:pPr lvl="2"/>
-            <a:r>
-              <a:rPr lang="en-US" smtClean="0"/>
-              <a:t>Third level</a:t>
-            </a:r>
-          </a:p>
-          <a:p>
-            <a:pPr lvl="3"/>
-            <a:r>
-              <a:rPr lang="en-US" smtClean="0"/>
-              <a:t>Fourth level</a:t>
-            </a:r>
-          </a:p>
-          <a:p>
-            <a:pPr lvl="4"/>
-            <a:r>
-              <a:rPr lang="en-US" smtClean="0"/>
-              <a:t>Fifth level</a:t>
-            </a:r>
-            <a:endParaRPr lang="en-US"/>
-          </a:p>
-        </p:txBody>
-      </p:sp>
-      <p:sp>
-        <p:nvSpPr>
-          <p:cNvPr id="7" name="Date Placeholder 6"/>
-          <p:cNvSpPr>
-            <a:spLocks noGrp="1"/>
-          </p:cNvSpPr>
-          <p:nvPr>
-            <p:ph type="dt" sz="half" idx="10"/>
-          </p:nvPr>
-        </p:nvSpPr>
-        <p:spPr/>
-        <p:txBody>
-          <a:bodyPr/>
-          <a:lstStyle/>
-          <a:p>
-            <a:fld id="{5BCAD085-E8A6-8845-BD4E-CB4CCA059FC4}" type="datetimeFigureOut">
-              <a:rPr lang="en-US" smtClean="0"/>
-              <a:t>1/27/13</a:t>
+              <a:t>8/14/2021</a:t>
             </a:fld>
             <a:endParaRPr lang="en-US"/>
           </a:p>
@@ -1772,7 +1834,13 @@
       </p:sp>
       <p:sp>
         <p:nvSpPr>
-          <p:cNvPr id="8" name="Footer Placeholder 7"/>
+          <p:cNvPr id="8" name="Footer Placeholder 7">
+            <a:extLst>
+              <a:ext uri="{FF2B5EF4-FFF2-40B4-BE49-F238E27FC236}">
+                <a16:creationId xmlns:a16="http://schemas.microsoft.com/office/drawing/2014/main" id="{30A3BA9B-3248-402B-8432-5DEF7A60AB43}"/>
+              </a:ext>
+            </a:extLst>
+          </p:cNvPr>
           <p:cNvSpPr>
             <a:spLocks noGrp="1"/>
           </p:cNvSpPr>
@@ -1791,7 +1859,13 @@
       </p:sp>
       <p:sp>
         <p:nvSpPr>
-          <p:cNvPr id="9" name="Slide Number Placeholder 8"/>
+          <p:cNvPr id="9" name="Slide Number Placeholder 8">
+            <a:extLst>
+              <a:ext uri="{FF2B5EF4-FFF2-40B4-BE49-F238E27FC236}">
+                <a16:creationId xmlns:a16="http://schemas.microsoft.com/office/drawing/2014/main" id="{814FF18F-316A-49FD-BC01-56B50B8B015B}"/>
+              </a:ext>
+            </a:extLst>
+          </p:cNvPr>
           <p:cNvSpPr>
             <a:spLocks noGrp="1"/>
           </p:cNvSpPr>
@@ -1804,7 +1878,7 @@
           <a:bodyPr/>
           <a:lstStyle/>
           <a:p>
-            <a:fld id="{C1FF6DA9-008F-8B48-92A6-B652298478BF}" type="slidenum">
+            <a:fld id="{6357C050-2BB0-42CB-AF71-1035C47D7F82}" type="slidenum">
               <a:rPr lang="en-US" smtClean="0"/>
               <a:t>‹#›</a:t>
             </a:fld>
@@ -1815,7 +1889,7 @@
     </p:spTree>
     <p:extLst>
       <p:ext uri="{BB962C8B-B14F-4D97-AF65-F5344CB8AC3E}">
-        <p14:creationId xmlns:p14="http://schemas.microsoft.com/office/powerpoint/2010/main" val="990158736"/>
+        <p14:creationId xmlns:p14="http://schemas.microsoft.com/office/powerpoint/2010/main" val="3753764374"/>
       </p:ext>
     </p:extLst>
   </p:cSld>
@@ -1844,7 +1918,13 @@
       </p:grpSpPr>
       <p:sp>
         <p:nvSpPr>
-          <p:cNvPr id="2" name="Title 1"/>
+          <p:cNvPr id="2" name="Title 1">
+            <a:extLst>
+              <a:ext uri="{FF2B5EF4-FFF2-40B4-BE49-F238E27FC236}">
+                <a16:creationId xmlns:a16="http://schemas.microsoft.com/office/drawing/2014/main" id="{7121DC5A-DA25-460A-AE0B-E827AAB5055C}"/>
+              </a:ext>
+            </a:extLst>
+          </p:cNvPr>
           <p:cNvSpPr>
             <a:spLocks noGrp="1"/>
           </p:cNvSpPr>
@@ -1858,31 +1938,36 @@
           <a:lstStyle/>
           <a:p>
             <a:r>
+              <a:rPr lang="en-US"/>
+              <a:t>Click to edit Master title style</a:t>
+            </a:r>
+          </a:p>
+        </p:txBody>
+      </p:sp>
+      <p:sp>
+        <p:nvSpPr>
+          <p:cNvPr id="3" name="Date Placeholder 2">
+            <a:extLst>
+              <a:ext uri="{FF2B5EF4-FFF2-40B4-BE49-F238E27FC236}">
+                <a16:creationId xmlns:a16="http://schemas.microsoft.com/office/drawing/2014/main" id="{1615C01A-332E-4C91-A7D7-7CBE0035C1BA}"/>
+              </a:ext>
+            </a:extLst>
+          </p:cNvPr>
+          <p:cNvSpPr>
+            <a:spLocks noGrp="1"/>
+          </p:cNvSpPr>
+          <p:nvPr>
+            <p:ph type="dt" sz="half" idx="10"/>
+          </p:nvPr>
+        </p:nvSpPr>
+        <p:spPr/>
+        <p:txBody>
+          <a:bodyPr/>
+          <a:lstStyle/>
+          <a:p>
+            <a:fld id="{6F3F5EC3-68B3-43B2-9B30-E347987FCF54}" type="datetimeFigureOut">
               <a:rPr lang="en-US" smtClean="0"/>
-              <a:t>Click to edit Master title style</a:t>
-            </a:r>
-            <a:endParaRPr lang="en-US"/>
-          </a:p>
-        </p:txBody>
-      </p:sp>
-      <p:sp>
-        <p:nvSpPr>
-          <p:cNvPr id="3" name="Date Placeholder 2"/>
-          <p:cNvSpPr>
-            <a:spLocks noGrp="1"/>
-          </p:cNvSpPr>
-          <p:nvPr>
-            <p:ph type="dt" sz="half" idx="10"/>
-          </p:nvPr>
-        </p:nvSpPr>
-        <p:spPr/>
-        <p:txBody>
-          <a:bodyPr/>
-          <a:lstStyle/>
-          <a:p>
-            <a:fld id="{5BCAD085-E8A6-8845-BD4E-CB4CCA059FC4}" type="datetimeFigureOut">
-              <a:rPr lang="en-US" smtClean="0"/>
-              <a:t>1/27/13</a:t>
+              <a:t>8/14/2021</a:t>
             </a:fld>
             <a:endParaRPr lang="en-US"/>
           </a:p>
@@ -1890,7 +1975,13 @@
       </p:sp>
       <p:sp>
         <p:nvSpPr>
-          <p:cNvPr id="4" name="Footer Placeholder 3"/>
+          <p:cNvPr id="4" name="Footer Placeholder 3">
+            <a:extLst>
+              <a:ext uri="{FF2B5EF4-FFF2-40B4-BE49-F238E27FC236}">
+                <a16:creationId xmlns:a16="http://schemas.microsoft.com/office/drawing/2014/main" id="{0D869318-9848-48DA-9A94-FA6C3D99E569}"/>
+              </a:ext>
+            </a:extLst>
+          </p:cNvPr>
           <p:cNvSpPr>
             <a:spLocks noGrp="1"/>
           </p:cNvSpPr>
@@ -1909,7 +2000,13 @@
       </p:sp>
       <p:sp>
         <p:nvSpPr>
-          <p:cNvPr id="5" name="Slide Number Placeholder 4"/>
+          <p:cNvPr id="5" name="Slide Number Placeholder 4">
+            <a:extLst>
+              <a:ext uri="{FF2B5EF4-FFF2-40B4-BE49-F238E27FC236}">
+                <a16:creationId xmlns:a16="http://schemas.microsoft.com/office/drawing/2014/main" id="{6B21E453-4ECE-43DF-BCD5-8C94B92122C8}"/>
+              </a:ext>
+            </a:extLst>
+          </p:cNvPr>
           <p:cNvSpPr>
             <a:spLocks noGrp="1"/>
           </p:cNvSpPr>
@@ -1922,7 +2019,7 @@
           <a:bodyPr/>
           <a:lstStyle/>
           <a:p>
-            <a:fld id="{C1FF6DA9-008F-8B48-92A6-B652298478BF}" type="slidenum">
+            <a:fld id="{6357C050-2BB0-42CB-AF71-1035C47D7F82}" type="slidenum">
               <a:rPr lang="en-US" smtClean="0"/>
               <a:t>‹#›</a:t>
             </a:fld>
@@ -1933,7 +2030,7 @@
     </p:spTree>
     <p:extLst>
       <p:ext uri="{BB962C8B-B14F-4D97-AF65-F5344CB8AC3E}">
-        <p14:creationId xmlns:p14="http://schemas.microsoft.com/office/powerpoint/2010/main" val="727027711"/>
+        <p14:creationId xmlns:p14="http://schemas.microsoft.com/office/powerpoint/2010/main" val="1790501624"/>
       </p:ext>
     </p:extLst>
   </p:cSld>
@@ -1962,7 +2059,13 @@
       </p:grpSpPr>
       <p:sp>
         <p:nvSpPr>
-          <p:cNvPr id="2" name="Date Placeholder 1"/>
+          <p:cNvPr id="2" name="Date Placeholder 1">
+            <a:extLst>
+              <a:ext uri="{FF2B5EF4-FFF2-40B4-BE49-F238E27FC236}">
+                <a16:creationId xmlns:a16="http://schemas.microsoft.com/office/drawing/2014/main" id="{F42B59EC-C10A-48BC-A035-447953BA7812}"/>
+              </a:ext>
+            </a:extLst>
+          </p:cNvPr>
           <p:cNvSpPr>
             <a:spLocks noGrp="1"/>
           </p:cNvSpPr>
@@ -1975,9 +2078,9 @@
           <a:bodyPr/>
           <a:lstStyle/>
           <a:p>
-            <a:fld id="{5BCAD085-E8A6-8845-BD4E-CB4CCA059FC4}" type="datetimeFigureOut">
+            <a:fld id="{6F3F5EC3-68B3-43B2-9B30-E347987FCF54}" type="datetimeFigureOut">
               <a:rPr lang="en-US" smtClean="0"/>
-              <a:t>1/27/13</a:t>
+              <a:t>8/14/2021</a:t>
             </a:fld>
             <a:endParaRPr lang="en-US"/>
           </a:p>
@@ -1985,7 +2088,13 @@
       </p:sp>
       <p:sp>
         <p:nvSpPr>
-          <p:cNvPr id="3" name="Footer Placeholder 2"/>
+          <p:cNvPr id="3" name="Footer Placeholder 2">
+            <a:extLst>
+              <a:ext uri="{FF2B5EF4-FFF2-40B4-BE49-F238E27FC236}">
+                <a16:creationId xmlns:a16="http://schemas.microsoft.com/office/drawing/2014/main" id="{28163302-8728-4C0A-BB21-18A7852F0056}"/>
+              </a:ext>
+            </a:extLst>
+          </p:cNvPr>
           <p:cNvSpPr>
             <a:spLocks noGrp="1"/>
           </p:cNvSpPr>
@@ -2004,7 +2113,13 @@
       </p:sp>
       <p:sp>
         <p:nvSpPr>
-          <p:cNvPr id="4" name="Slide Number Placeholder 3"/>
+          <p:cNvPr id="4" name="Slide Number Placeholder 3">
+            <a:extLst>
+              <a:ext uri="{FF2B5EF4-FFF2-40B4-BE49-F238E27FC236}">
+                <a16:creationId xmlns:a16="http://schemas.microsoft.com/office/drawing/2014/main" id="{54F0EC09-E904-47FD-A76D-EAACE52599C7}"/>
+              </a:ext>
+            </a:extLst>
+          </p:cNvPr>
           <p:cNvSpPr>
             <a:spLocks noGrp="1"/>
           </p:cNvSpPr>
@@ -2017,7 +2132,7 @@
           <a:bodyPr/>
           <a:lstStyle/>
           <a:p>
-            <a:fld id="{C1FF6DA9-008F-8B48-92A6-B652298478BF}" type="slidenum">
+            <a:fld id="{6357C050-2BB0-42CB-AF71-1035C47D7F82}" type="slidenum">
               <a:rPr lang="en-US" smtClean="0"/>
               <a:t>‹#›</a:t>
             </a:fld>
@@ -2028,7 +2143,7 @@
     </p:spTree>
     <p:extLst>
       <p:ext uri="{BB962C8B-B14F-4D97-AF65-F5344CB8AC3E}">
-        <p14:creationId xmlns:p14="http://schemas.microsoft.com/office/powerpoint/2010/main" val="1212999818"/>
+        <p14:creationId xmlns:p14="http://schemas.microsoft.com/office/powerpoint/2010/main" val="519819982"/>
       </p:ext>
     </p:extLst>
   </p:cSld>
@@ -2057,7 +2172,13 @@
       </p:grpSpPr>
       <p:sp>
         <p:nvSpPr>
-          <p:cNvPr id="2" name="Title 1"/>
+          <p:cNvPr id="2" name="Title 1">
+            <a:extLst>
+              <a:ext uri="{FF2B5EF4-FFF2-40B4-BE49-F238E27FC236}">
+                <a16:creationId xmlns:a16="http://schemas.microsoft.com/office/drawing/2014/main" id="{84555A5F-6464-4B7F-8495-6922B4913FDE}"/>
+              </a:ext>
+            </a:extLst>
+          </p:cNvPr>
           <p:cNvSpPr>
             <a:spLocks noGrp="1"/>
           </p:cNvSpPr>
@@ -2067,29 +2188,34 @@
         </p:nvSpPr>
         <p:spPr>
           <a:xfrm>
-            <a:off x="457200" y="273050"/>
-            <a:ext cx="3008313" cy="1162050"/>
+            <a:off x="839788" y="457200"/>
+            <a:ext cx="3932237" cy="1600200"/>
           </a:xfrm>
         </p:spPr>
         <p:txBody>
           <a:bodyPr anchor="b"/>
           <a:lstStyle>
-            <a:lvl1pPr algn="l">
-              <a:defRPr sz="2000" b="1"/>
+            <a:lvl1pPr>
+              <a:defRPr sz="3200"/>
             </a:lvl1pPr>
           </a:lstStyle>
           <a:p>
             <a:r>
-              <a:rPr lang="en-US" smtClean="0"/>
+              <a:rPr lang="en-US"/>
               <a:t>Click to edit Master title style</a:t>
             </a:r>
-            <a:endParaRPr lang="en-US"/>
-          </a:p>
-        </p:txBody>
-      </p:sp>
-      <p:sp>
-        <p:nvSpPr>
-          <p:cNvPr id="3" name="Content Placeholder 2"/>
+          </a:p>
+        </p:txBody>
+      </p:sp>
+      <p:sp>
+        <p:nvSpPr>
+          <p:cNvPr id="3" name="Content Placeholder 2">
+            <a:extLst>
+              <a:ext uri="{FF2B5EF4-FFF2-40B4-BE49-F238E27FC236}">
+                <a16:creationId xmlns:a16="http://schemas.microsoft.com/office/drawing/2014/main" id="{55121678-9FD2-4F18-B1B5-404591C247C2}"/>
+              </a:ext>
+            </a:extLst>
+          </p:cNvPr>
           <p:cNvSpPr>
             <a:spLocks noGrp="1"/>
           </p:cNvSpPr>
@@ -2099,8 +2225,8 @@
         </p:nvSpPr>
         <p:spPr>
           <a:xfrm>
-            <a:off x="3575050" y="273050"/>
-            <a:ext cx="5111750" cy="5853113"/>
+            <a:off x="5183188" y="987425"/>
+            <a:ext cx="6172200" cy="4873625"/>
           </a:xfrm>
         </p:spPr>
         <p:txBody>
@@ -2137,44 +2263,49 @@
           <a:p>
             <a:pPr lvl="0"/>
             <a:r>
-              <a:rPr lang="en-US" smtClean="0"/>
+              <a:rPr lang="en-US"/>
               <a:t>Click to edit Master text styles</a:t>
             </a:r>
           </a:p>
           <a:p>
             <a:pPr lvl="1"/>
             <a:r>
-              <a:rPr lang="en-US" smtClean="0"/>
+              <a:rPr lang="en-US"/>
               <a:t>Second level</a:t>
             </a:r>
           </a:p>
           <a:p>
             <a:pPr lvl="2"/>
             <a:r>
-              <a:rPr lang="en-US" smtClean="0"/>
+              <a:rPr lang="en-US"/>
               <a:t>Third level</a:t>
             </a:r>
           </a:p>
           <a:p>
             <a:pPr lvl="3"/>
             <a:r>
-              <a:rPr lang="en-US" smtClean="0"/>
+              <a:rPr lang="en-US"/>
               <a:t>Fourth level</a:t>
             </a:r>
           </a:p>
           <a:p>
             <a:pPr lvl="4"/>
             <a:r>
-              <a:rPr lang="en-US" smtClean="0"/>
+              <a:rPr lang="en-US"/>
               <a:t>Fifth level</a:t>
             </a:r>
-            <a:endParaRPr lang="en-US"/>
-          </a:p>
-        </p:txBody>
-      </p:sp>
-      <p:sp>
-        <p:nvSpPr>
-          <p:cNvPr id="4" name="Text Placeholder 3"/>
+          </a:p>
+        </p:txBody>
+      </p:sp>
+      <p:sp>
+        <p:nvSpPr>
+          <p:cNvPr id="4" name="Text Placeholder 3">
+            <a:extLst>
+              <a:ext uri="{FF2B5EF4-FFF2-40B4-BE49-F238E27FC236}">
+                <a16:creationId xmlns:a16="http://schemas.microsoft.com/office/drawing/2014/main" id="{8DB5CE02-54F7-4957-B308-8815D49B8F3C}"/>
+              </a:ext>
+            </a:extLst>
+          </p:cNvPr>
           <p:cNvSpPr>
             <a:spLocks noGrp="1"/>
           </p:cNvSpPr>
@@ -2184,8 +2315,8 @@
         </p:nvSpPr>
         <p:spPr>
           <a:xfrm>
-            <a:off x="457200" y="1435100"/>
-            <a:ext cx="3008313" cy="4691063"/>
+            <a:off x="839788" y="2057400"/>
+            <a:ext cx="3932237" cy="3811588"/>
           </a:xfrm>
         </p:spPr>
         <p:txBody>
@@ -2193,68 +2324,74 @@
           <a:lstStyle>
             <a:lvl1pPr marL="0" indent="0">
               <a:buNone/>
-              <a:defRPr sz="1400"/>
+              <a:defRPr sz="1600"/>
             </a:lvl1pPr>
             <a:lvl2pPr marL="457200" indent="0">
               <a:buNone/>
-              <a:defRPr sz="1200"/>
+              <a:defRPr sz="1400"/>
             </a:lvl2pPr>
             <a:lvl3pPr marL="914400" indent="0">
               <a:buNone/>
-              <a:defRPr sz="1000"/>
+              <a:defRPr sz="1200"/>
             </a:lvl3pPr>
             <a:lvl4pPr marL="1371600" indent="0">
               <a:buNone/>
-              <a:defRPr sz="900"/>
+              <a:defRPr sz="1000"/>
             </a:lvl4pPr>
             <a:lvl5pPr marL="1828800" indent="0">
               <a:buNone/>
-              <a:defRPr sz="900"/>
+              <a:defRPr sz="1000"/>
             </a:lvl5pPr>
             <a:lvl6pPr marL="2286000" indent="0">
               <a:buNone/>
-              <a:defRPr sz="900"/>
+              <a:defRPr sz="1000"/>
             </a:lvl6pPr>
             <a:lvl7pPr marL="2743200" indent="0">
               <a:buNone/>
-              <a:defRPr sz="900"/>
+              <a:defRPr sz="1000"/>
             </a:lvl7pPr>
             <a:lvl8pPr marL="3200400" indent="0">
               <a:buNone/>
-              <a:defRPr sz="900"/>
+              <a:defRPr sz="1000"/>
             </a:lvl8pPr>
             <a:lvl9pPr marL="3657600" indent="0">
               <a:buNone/>
-              <a:defRPr sz="900"/>
+              <a:defRPr sz="1000"/>
             </a:lvl9pPr>
           </a:lstStyle>
           <a:p>
             <a:pPr lvl="0"/>
             <a:r>
+              <a:rPr lang="en-US"/>
+              <a:t>Click to edit Master text styles</a:t>
+            </a:r>
+          </a:p>
+        </p:txBody>
+      </p:sp>
+      <p:sp>
+        <p:nvSpPr>
+          <p:cNvPr id="5" name="Date Placeholder 4">
+            <a:extLst>
+              <a:ext uri="{FF2B5EF4-FFF2-40B4-BE49-F238E27FC236}">
+                <a16:creationId xmlns:a16="http://schemas.microsoft.com/office/drawing/2014/main" id="{7B5EBA1C-8BDD-4D57-830F-DAA5824BC833}"/>
+              </a:ext>
+            </a:extLst>
+          </p:cNvPr>
+          <p:cNvSpPr>
+            <a:spLocks noGrp="1"/>
+          </p:cNvSpPr>
+          <p:nvPr>
+            <p:ph type="dt" sz="half" idx="10"/>
+          </p:nvPr>
+        </p:nvSpPr>
+        <p:spPr/>
+        <p:txBody>
+          <a:bodyPr/>
+          <a:lstStyle/>
+          <a:p>
+            <a:fld id="{6F3F5EC3-68B3-43B2-9B30-E347987FCF54}" type="datetimeFigureOut">
               <a:rPr lang="en-US" smtClean="0"/>
-              <a:t>Click to edit Master text styles</a:t>
-            </a:r>
-          </a:p>
-        </p:txBody>
-      </p:sp>
-      <p:sp>
-        <p:nvSpPr>
-          <p:cNvPr id="5" name="Date Placeholder 4"/>
-          <p:cNvSpPr>
-            <a:spLocks noGrp="1"/>
-          </p:cNvSpPr>
-          <p:nvPr>
-            <p:ph type="dt" sz="half" idx="10"/>
-          </p:nvPr>
-        </p:nvSpPr>
-        <p:spPr/>
-        <p:txBody>
-          <a:bodyPr/>
-          <a:lstStyle/>
-          <a:p>
-            <a:fld id="{5BCAD085-E8A6-8845-BD4E-CB4CCA059FC4}" type="datetimeFigureOut">
-              <a:rPr lang="en-US" smtClean="0"/>
-              <a:t>1/27/13</a:t>
+              <a:t>8/14/2021</a:t>
             </a:fld>
             <a:endParaRPr lang="en-US"/>
           </a:p>
@@ -2262,7 +2399,13 @@
       </p:sp>
       <p:sp>
         <p:nvSpPr>
-          <p:cNvPr id="6" name="Footer Placeholder 5"/>
+          <p:cNvPr id="6" name="Footer Placeholder 5">
+            <a:extLst>
+              <a:ext uri="{FF2B5EF4-FFF2-40B4-BE49-F238E27FC236}">
+                <a16:creationId xmlns:a16="http://schemas.microsoft.com/office/drawing/2014/main" id="{854BD236-1DAD-4644-96DE-6DF44B3A477F}"/>
+              </a:ext>
+            </a:extLst>
+          </p:cNvPr>
           <p:cNvSpPr>
             <a:spLocks noGrp="1"/>
           </p:cNvSpPr>
@@ -2281,7 +2424,13 @@
       </p:sp>
       <p:sp>
         <p:nvSpPr>
-          <p:cNvPr id="7" name="Slide Number Placeholder 6"/>
+          <p:cNvPr id="7" name="Slide Number Placeholder 6">
+            <a:extLst>
+              <a:ext uri="{FF2B5EF4-FFF2-40B4-BE49-F238E27FC236}">
+                <a16:creationId xmlns:a16="http://schemas.microsoft.com/office/drawing/2014/main" id="{FB67B3B6-65E2-424A-91BE-DFDB454DC31F}"/>
+              </a:ext>
+            </a:extLst>
+          </p:cNvPr>
           <p:cNvSpPr>
             <a:spLocks noGrp="1"/>
           </p:cNvSpPr>
@@ -2294,7 +2443,7 @@
           <a:bodyPr/>
           <a:lstStyle/>
           <a:p>
-            <a:fld id="{C1FF6DA9-008F-8B48-92A6-B652298478BF}" type="slidenum">
+            <a:fld id="{6357C050-2BB0-42CB-AF71-1035C47D7F82}" type="slidenum">
               <a:rPr lang="en-US" smtClean="0"/>
               <a:t>‹#›</a:t>
             </a:fld>
@@ -2305,7 +2454,7 @@
     </p:spTree>
     <p:extLst>
       <p:ext uri="{BB962C8B-B14F-4D97-AF65-F5344CB8AC3E}">
-        <p14:creationId xmlns:p14="http://schemas.microsoft.com/office/powerpoint/2010/main" val="1840726560"/>
+        <p14:creationId xmlns:p14="http://schemas.microsoft.com/office/powerpoint/2010/main" val="2459696674"/>
       </p:ext>
     </p:extLst>
   </p:cSld>
@@ -2334,7 +2483,13 @@
       </p:grpSpPr>
       <p:sp>
         <p:nvSpPr>
-          <p:cNvPr id="2" name="Title 1"/>
+          <p:cNvPr id="2" name="Title 1">
+            <a:extLst>
+              <a:ext uri="{FF2B5EF4-FFF2-40B4-BE49-F238E27FC236}">
+                <a16:creationId xmlns:a16="http://schemas.microsoft.com/office/drawing/2014/main" id="{182CC7F8-AC95-4F6F-8F1A-28EC92C6780F}"/>
+              </a:ext>
+            </a:extLst>
+          </p:cNvPr>
           <p:cNvSpPr>
             <a:spLocks noGrp="1"/>
           </p:cNvSpPr>
@@ -2344,29 +2499,34 @@
         </p:nvSpPr>
         <p:spPr>
           <a:xfrm>
-            <a:off x="1792288" y="4800600"/>
-            <a:ext cx="5486400" cy="566738"/>
+            <a:off x="839788" y="457200"/>
+            <a:ext cx="3932237" cy="1600200"/>
           </a:xfrm>
         </p:spPr>
         <p:txBody>
           <a:bodyPr anchor="b"/>
           <a:lstStyle>
-            <a:lvl1pPr algn="l">
-              <a:defRPr sz="2000" b="1"/>
+            <a:lvl1pPr>
+              <a:defRPr sz="3200"/>
             </a:lvl1pPr>
           </a:lstStyle>
           <a:p>
             <a:r>
-              <a:rPr lang="en-US" smtClean="0"/>
+              <a:rPr lang="en-US"/>
               <a:t>Click to edit Master title style</a:t>
             </a:r>
-            <a:endParaRPr lang="en-US"/>
-          </a:p>
-        </p:txBody>
-      </p:sp>
-      <p:sp>
-        <p:nvSpPr>
-          <p:cNvPr id="3" name="Picture Placeholder 2"/>
+          </a:p>
+        </p:txBody>
+      </p:sp>
+      <p:sp>
+        <p:nvSpPr>
+          <p:cNvPr id="3" name="Picture Placeholder 2">
+            <a:extLst>
+              <a:ext uri="{FF2B5EF4-FFF2-40B4-BE49-F238E27FC236}">
+                <a16:creationId xmlns:a16="http://schemas.microsoft.com/office/drawing/2014/main" id="{4CE8728B-755C-4964-B1D8-FE9034DDDB6A}"/>
+              </a:ext>
+            </a:extLst>
+          </p:cNvPr>
           <p:cNvSpPr>
             <a:spLocks noGrp="1"/>
           </p:cNvSpPr>
@@ -2376,8 +2536,8 @@
         </p:nvSpPr>
         <p:spPr>
           <a:xfrm>
-            <a:off x="1792288" y="612775"/>
-            <a:ext cx="5486400" cy="4114800"/>
+            <a:off x="5183188" y="987425"/>
+            <a:ext cx="6172200" cy="4873625"/>
           </a:xfrm>
         </p:spPr>
         <p:txBody>
@@ -2427,7 +2587,13 @@
       </p:sp>
       <p:sp>
         <p:nvSpPr>
-          <p:cNvPr id="4" name="Text Placeholder 3"/>
+          <p:cNvPr id="4" name="Text Placeholder 3">
+            <a:extLst>
+              <a:ext uri="{FF2B5EF4-FFF2-40B4-BE49-F238E27FC236}">
+                <a16:creationId xmlns:a16="http://schemas.microsoft.com/office/drawing/2014/main" id="{61CF14C7-16FE-4504-B2BA-B67E5B802E9D}"/>
+              </a:ext>
+            </a:extLst>
+          </p:cNvPr>
           <p:cNvSpPr>
             <a:spLocks noGrp="1"/>
           </p:cNvSpPr>
@@ -2437,8 +2603,8 @@
         </p:nvSpPr>
         <p:spPr>
           <a:xfrm>
-            <a:off x="1792288" y="5367338"/>
-            <a:ext cx="5486400" cy="804862"/>
+            <a:off x="839788" y="2057400"/>
+            <a:ext cx="3932237" cy="3811588"/>
           </a:xfrm>
         </p:spPr>
         <p:txBody>
@@ -2446,68 +2612,74 @@
           <a:lstStyle>
             <a:lvl1pPr marL="0" indent="0">
               <a:buNone/>
-              <a:defRPr sz="1400"/>
+              <a:defRPr sz="1600"/>
             </a:lvl1pPr>
             <a:lvl2pPr marL="457200" indent="0">
               <a:buNone/>
-              <a:defRPr sz="1200"/>
+              <a:defRPr sz="1400"/>
             </a:lvl2pPr>
             <a:lvl3pPr marL="914400" indent="0">
               <a:buNone/>
-              <a:defRPr sz="1000"/>
+              <a:defRPr sz="1200"/>
             </a:lvl3pPr>
             <a:lvl4pPr marL="1371600" indent="0">
               <a:buNone/>
-              <a:defRPr sz="900"/>
+              <a:defRPr sz="1000"/>
             </a:lvl4pPr>
             <a:lvl5pPr marL="1828800" indent="0">
               <a:buNone/>
-              <a:defRPr sz="900"/>
+              <a:defRPr sz="1000"/>
             </a:lvl5pPr>
             <a:lvl6pPr marL="2286000" indent="0">
               <a:buNone/>
-              <a:defRPr sz="900"/>
+              <a:defRPr sz="1000"/>
             </a:lvl6pPr>
             <a:lvl7pPr marL="2743200" indent="0">
               <a:buNone/>
-              <a:defRPr sz="900"/>
+              <a:defRPr sz="1000"/>
             </a:lvl7pPr>
             <a:lvl8pPr marL="3200400" indent="0">
               <a:buNone/>
-              <a:defRPr sz="900"/>
+              <a:defRPr sz="1000"/>
             </a:lvl8pPr>
             <a:lvl9pPr marL="3657600" indent="0">
               <a:buNone/>
-              <a:defRPr sz="900"/>
+              <a:defRPr sz="1000"/>
             </a:lvl9pPr>
           </a:lstStyle>
           <a:p>
             <a:pPr lvl="0"/>
             <a:r>
+              <a:rPr lang="en-US"/>
+              <a:t>Click to edit Master text styles</a:t>
+            </a:r>
+          </a:p>
+        </p:txBody>
+      </p:sp>
+      <p:sp>
+        <p:nvSpPr>
+          <p:cNvPr id="5" name="Date Placeholder 4">
+            <a:extLst>
+              <a:ext uri="{FF2B5EF4-FFF2-40B4-BE49-F238E27FC236}">
+                <a16:creationId xmlns:a16="http://schemas.microsoft.com/office/drawing/2014/main" id="{2C02E21C-468C-4CE7-8F37-EBF012E72F9B}"/>
+              </a:ext>
+            </a:extLst>
+          </p:cNvPr>
+          <p:cNvSpPr>
+            <a:spLocks noGrp="1"/>
+          </p:cNvSpPr>
+          <p:nvPr>
+            <p:ph type="dt" sz="half" idx="10"/>
+          </p:nvPr>
+        </p:nvSpPr>
+        <p:spPr/>
+        <p:txBody>
+          <a:bodyPr/>
+          <a:lstStyle/>
+          <a:p>
+            <a:fld id="{6F3F5EC3-68B3-43B2-9B30-E347987FCF54}" type="datetimeFigureOut">
               <a:rPr lang="en-US" smtClean="0"/>
-              <a:t>Click to edit Master text styles</a:t>
-            </a:r>
-          </a:p>
-        </p:txBody>
-      </p:sp>
-      <p:sp>
-        <p:nvSpPr>
-          <p:cNvPr id="5" name="Date Placeholder 4"/>
-          <p:cNvSpPr>
-            <a:spLocks noGrp="1"/>
-          </p:cNvSpPr>
-          <p:nvPr>
-            <p:ph type="dt" sz="half" idx="10"/>
-          </p:nvPr>
-        </p:nvSpPr>
-        <p:spPr/>
-        <p:txBody>
-          <a:bodyPr/>
-          <a:lstStyle/>
-          <a:p>
-            <a:fld id="{5BCAD085-E8A6-8845-BD4E-CB4CCA059FC4}" type="datetimeFigureOut">
-              <a:rPr lang="en-US" smtClean="0"/>
-              <a:t>1/27/13</a:t>
+              <a:t>8/14/2021</a:t>
             </a:fld>
             <a:endParaRPr lang="en-US"/>
           </a:p>
@@ -2515,7 +2687,13 @@
       </p:sp>
       <p:sp>
         <p:nvSpPr>
-          <p:cNvPr id="6" name="Footer Placeholder 5"/>
+          <p:cNvPr id="6" name="Footer Placeholder 5">
+            <a:extLst>
+              <a:ext uri="{FF2B5EF4-FFF2-40B4-BE49-F238E27FC236}">
+                <a16:creationId xmlns:a16="http://schemas.microsoft.com/office/drawing/2014/main" id="{9E621871-82A9-4331-B4F5-8016E023721C}"/>
+              </a:ext>
+            </a:extLst>
+          </p:cNvPr>
           <p:cNvSpPr>
             <a:spLocks noGrp="1"/>
           </p:cNvSpPr>
@@ -2534,7 +2712,13 @@
       </p:sp>
       <p:sp>
         <p:nvSpPr>
-          <p:cNvPr id="7" name="Slide Number Placeholder 6"/>
+          <p:cNvPr id="7" name="Slide Number Placeholder 6">
+            <a:extLst>
+              <a:ext uri="{FF2B5EF4-FFF2-40B4-BE49-F238E27FC236}">
+                <a16:creationId xmlns:a16="http://schemas.microsoft.com/office/drawing/2014/main" id="{BF5AD027-B20B-499B-955F-1BA728234AC8}"/>
+              </a:ext>
+            </a:extLst>
+          </p:cNvPr>
           <p:cNvSpPr>
             <a:spLocks noGrp="1"/>
           </p:cNvSpPr>
@@ -2547,7 +2731,7 @@
           <a:bodyPr/>
           <a:lstStyle/>
           <a:p>
-            <a:fld id="{C1FF6DA9-008F-8B48-92A6-B652298478BF}" type="slidenum">
+            <a:fld id="{6357C050-2BB0-42CB-AF71-1035C47D7F82}" type="slidenum">
               <a:rPr lang="en-US" smtClean="0"/>
               <a:t>‹#›</a:t>
             </a:fld>
@@ -2558,7 +2742,7 @@
     </p:spTree>
     <p:extLst>
       <p:ext uri="{BB962C8B-B14F-4D97-AF65-F5344CB8AC3E}">
-        <p14:creationId xmlns:p14="http://schemas.microsoft.com/office/powerpoint/2010/main" val="3889236939"/>
+        <p14:creationId xmlns:p14="http://schemas.microsoft.com/office/powerpoint/2010/main" val="3873184322"/>
       </p:ext>
     </p:extLst>
   </p:cSld>
@@ -2592,7 +2776,13 @@
       </p:grpSpPr>
       <p:sp>
         <p:nvSpPr>
-          <p:cNvPr id="2" name="Title Placeholder 1"/>
+          <p:cNvPr id="2" name="Title Placeholder 1">
+            <a:extLst>
+              <a:ext uri="{FF2B5EF4-FFF2-40B4-BE49-F238E27FC236}">
+                <a16:creationId xmlns:a16="http://schemas.microsoft.com/office/drawing/2014/main" id="{9941E7FC-7CBE-4058-8E97-1324FCC992AF}"/>
+              </a:ext>
+            </a:extLst>
+          </p:cNvPr>
           <p:cNvSpPr>
             <a:spLocks noGrp="1"/>
           </p:cNvSpPr>
@@ -2602,8 +2792,8 @@
         </p:nvSpPr>
         <p:spPr>
           <a:xfrm>
-            <a:off x="457200" y="274638"/>
-            <a:ext cx="8229600" cy="1143000"/>
+            <a:off x="838200" y="365125"/>
+            <a:ext cx="10515600" cy="1325563"/>
           </a:xfrm>
           <a:prstGeom prst="rect">
             <a:avLst/>
@@ -2616,16 +2806,21 @@
           <a:lstStyle/>
           <a:p>
             <a:r>
-              <a:rPr lang="en-US" smtClean="0"/>
+              <a:rPr lang="en-US"/>
               <a:t>Click to edit Master title style</a:t>
             </a:r>
-            <a:endParaRPr lang="en-US"/>
-          </a:p>
-        </p:txBody>
-      </p:sp>
-      <p:sp>
-        <p:nvSpPr>
-          <p:cNvPr id="3" name="Text Placeholder 2"/>
+          </a:p>
+        </p:txBody>
+      </p:sp>
+      <p:sp>
+        <p:nvSpPr>
+          <p:cNvPr id="3" name="Text Placeholder 2">
+            <a:extLst>
+              <a:ext uri="{FF2B5EF4-FFF2-40B4-BE49-F238E27FC236}">
+                <a16:creationId xmlns:a16="http://schemas.microsoft.com/office/drawing/2014/main" id="{F22F9BC8-CFB0-483B-8393-E7E0FF85BFF3}"/>
+              </a:ext>
+            </a:extLst>
+          </p:cNvPr>
           <p:cNvSpPr>
             <a:spLocks noGrp="1"/>
           </p:cNvSpPr>
@@ -2635,8 +2830,8 @@
         </p:nvSpPr>
         <p:spPr>
           <a:xfrm>
-            <a:off x="457200" y="1600200"/>
-            <a:ext cx="8229600" cy="4525963"/>
+            <a:off x="838200" y="1825625"/>
+            <a:ext cx="10515600" cy="4351338"/>
           </a:xfrm>
           <a:prstGeom prst="rect">
             <a:avLst/>
@@ -2650,44 +2845,49 @@
           <a:p>
             <a:pPr lvl="0"/>
             <a:r>
-              <a:rPr lang="en-US" smtClean="0"/>
+              <a:rPr lang="en-US"/>
               <a:t>Click to edit Master text styles</a:t>
             </a:r>
           </a:p>
           <a:p>
             <a:pPr lvl="1"/>
             <a:r>
-              <a:rPr lang="en-US" smtClean="0"/>
+              <a:rPr lang="en-US"/>
               <a:t>Second level</a:t>
             </a:r>
           </a:p>
           <a:p>
             <a:pPr lvl="2"/>
             <a:r>
-              <a:rPr lang="en-US" smtClean="0"/>
+              <a:rPr lang="en-US"/>
               <a:t>Third level</a:t>
             </a:r>
           </a:p>
           <a:p>
             <a:pPr lvl="3"/>
             <a:r>
-              <a:rPr lang="en-US" smtClean="0"/>
+              <a:rPr lang="en-US"/>
               <a:t>Fourth level</a:t>
             </a:r>
           </a:p>
           <a:p>
             <a:pPr lvl="4"/>
             <a:r>
-              <a:rPr lang="en-US" smtClean="0"/>
+              <a:rPr lang="en-US"/>
               <a:t>Fifth level</a:t>
             </a:r>
-            <a:endParaRPr lang="en-US"/>
-          </a:p>
-        </p:txBody>
-      </p:sp>
-      <p:sp>
-        <p:nvSpPr>
-          <p:cNvPr id="4" name="Date Placeholder 3"/>
+          </a:p>
+        </p:txBody>
+      </p:sp>
+      <p:sp>
+        <p:nvSpPr>
+          <p:cNvPr id="4" name="Date Placeholder 3">
+            <a:extLst>
+              <a:ext uri="{FF2B5EF4-FFF2-40B4-BE49-F238E27FC236}">
+                <a16:creationId xmlns:a16="http://schemas.microsoft.com/office/drawing/2014/main" id="{1C27D3DB-B8C3-44DE-AB2B-97832B923130}"/>
+              </a:ext>
+            </a:extLst>
+          </p:cNvPr>
           <p:cNvSpPr>
             <a:spLocks noGrp="1"/>
           </p:cNvSpPr>
@@ -2697,8 +2897,8 @@
         </p:nvSpPr>
         <p:spPr>
           <a:xfrm>
-            <a:off x="457200" y="6356350"/>
-            <a:ext cx="2133600" cy="365125"/>
+            <a:off x="838200" y="6356350"/>
+            <a:ext cx="2743200" cy="365125"/>
           </a:xfrm>
           <a:prstGeom prst="rect">
             <a:avLst/>
@@ -2718,9 +2918,9 @@
             </a:lvl1pPr>
           </a:lstStyle>
           <a:p>
-            <a:fld id="{5BCAD085-E8A6-8845-BD4E-CB4CCA059FC4}" type="datetimeFigureOut">
+            <a:fld id="{6F3F5EC3-68B3-43B2-9B30-E347987FCF54}" type="datetimeFigureOut">
               <a:rPr lang="en-US" smtClean="0"/>
-              <a:t>1/27/13</a:t>
+              <a:t>8/14/2021</a:t>
             </a:fld>
             <a:endParaRPr lang="en-US"/>
           </a:p>
@@ -2728,7 +2928,13 @@
       </p:sp>
       <p:sp>
         <p:nvSpPr>
-          <p:cNvPr id="5" name="Footer Placeholder 4"/>
+          <p:cNvPr id="5" name="Footer Placeholder 4">
+            <a:extLst>
+              <a:ext uri="{FF2B5EF4-FFF2-40B4-BE49-F238E27FC236}">
+                <a16:creationId xmlns:a16="http://schemas.microsoft.com/office/drawing/2014/main" id="{4F56E444-CAAB-4AE3-85EB-90FBD0D17FF9}"/>
+              </a:ext>
+            </a:extLst>
+          </p:cNvPr>
           <p:cNvSpPr>
             <a:spLocks noGrp="1"/>
           </p:cNvSpPr>
@@ -2738,8 +2944,8 @@
         </p:nvSpPr>
         <p:spPr>
           <a:xfrm>
-            <a:off x="3124200" y="6356350"/>
-            <a:ext cx="2895600" cy="365125"/>
+            <a:off x="4038600" y="6356350"/>
+            <a:ext cx="4114800" cy="365125"/>
           </a:xfrm>
           <a:prstGeom prst="rect">
             <a:avLst/>
@@ -2765,7 +2971,13 @@
       </p:sp>
       <p:sp>
         <p:nvSpPr>
-          <p:cNvPr id="6" name="Slide Number Placeholder 5"/>
+          <p:cNvPr id="6" name="Slide Number Placeholder 5">
+            <a:extLst>
+              <a:ext uri="{FF2B5EF4-FFF2-40B4-BE49-F238E27FC236}">
+                <a16:creationId xmlns:a16="http://schemas.microsoft.com/office/drawing/2014/main" id="{81779C86-EFA3-4E34-AACD-90685795C535}"/>
+              </a:ext>
+            </a:extLst>
+          </p:cNvPr>
           <p:cNvSpPr>
             <a:spLocks noGrp="1"/>
           </p:cNvSpPr>
@@ -2775,8 +2987,8 @@
         </p:nvSpPr>
         <p:spPr>
           <a:xfrm>
-            <a:off x="6553200" y="6356350"/>
-            <a:ext cx="2133600" cy="365125"/>
+            <a:off x="8610600" y="6356350"/>
+            <a:ext cx="2743200" cy="365125"/>
           </a:xfrm>
           <a:prstGeom prst="rect">
             <a:avLst/>
@@ -2796,7 +3008,7 @@
             </a:lvl1pPr>
           </a:lstStyle>
           <a:p>
-            <a:fld id="{C1FF6DA9-008F-8B48-92A6-B652298478BF}" type="slidenum">
+            <a:fld id="{6357C050-2BB0-42CB-AF71-1035C47D7F82}" type="slidenum">
               <a:rPr lang="en-US" smtClean="0"/>
               <a:t>‹#›</a:t>
             </a:fld>
@@ -2807,7 +3019,7 @@
     </p:spTree>
     <p:extLst>
       <p:ext uri="{BB962C8B-B14F-4D97-AF65-F5344CB8AC3E}">
-        <p14:creationId xmlns:p14="http://schemas.microsoft.com/office/powerpoint/2010/main" val="2209977519"/>
+        <p14:creationId xmlns:p14="http://schemas.microsoft.com/office/powerpoint/2010/main" val="3732974191"/>
       </p:ext>
     </p:extLst>
   </p:cSld>
@@ -2827,7 +3039,10 @@
   </p:sldLayoutIdLst>
   <p:txStyles>
     <p:titleStyle>
-      <a:lvl1pPr algn="ctr" defTabSz="457200" rtl="0" eaLnBrk="1" latinLnBrk="0" hangingPunct="1">
+      <a:lvl1pPr algn="l" defTabSz="914400" rtl="0" eaLnBrk="1" latinLnBrk="0" hangingPunct="1">
+        <a:lnSpc>
+          <a:spcPct val="90000"/>
+        </a:lnSpc>
         <a:spcBef>
           <a:spcPct val="0"/>
         </a:spcBef>
@@ -2843,13 +3058,16 @@
       </a:lvl1pPr>
     </p:titleStyle>
     <p:bodyStyle>
-      <a:lvl1pPr marL="342900" indent="-342900" algn="l" defTabSz="457200" rtl="0" eaLnBrk="1" latinLnBrk="0" hangingPunct="1">
+      <a:lvl1pPr marL="228600" indent="-228600" algn="l" defTabSz="914400" rtl="0" eaLnBrk="1" latinLnBrk="0" hangingPunct="1">
+        <a:lnSpc>
+          <a:spcPct val="90000"/>
+        </a:lnSpc>
         <a:spcBef>
-          <a:spcPct val="20000"/>
+          <a:spcPts val="1000"/>
         </a:spcBef>
-        <a:buFont typeface="Arial"/>
+        <a:buFont typeface="Arial" panose="020B0604020202020204" pitchFamily="34" charset="0"/>
         <a:buChar char="•"/>
-        <a:defRPr sz="3200" kern="1200">
+        <a:defRPr sz="2800" kern="1200">
           <a:solidFill>
             <a:schemeClr val="tx1"/>
           </a:solidFill>
@@ -2858,26 +3076,14 @@
           <a:cs typeface="+mn-cs"/>
         </a:defRPr>
       </a:lvl1pPr>
-      <a:lvl2pPr marL="742950" indent="-285750" algn="l" defTabSz="457200" rtl="0" eaLnBrk="1" latinLnBrk="0" hangingPunct="1">
+      <a:lvl2pPr marL="685800" indent="-228600" algn="l" defTabSz="914400" rtl="0" eaLnBrk="1" latinLnBrk="0" hangingPunct="1">
+        <a:lnSpc>
+          <a:spcPct val="90000"/>
+        </a:lnSpc>
         <a:spcBef>
-          <a:spcPct val="20000"/>
+          <a:spcPts val="500"/>
         </a:spcBef>
-        <a:buFont typeface="Arial"/>
-        <a:buChar char="–"/>
-        <a:defRPr sz="2800" kern="1200">
-          <a:solidFill>
-            <a:schemeClr val="tx1"/>
-          </a:solidFill>
-          <a:latin typeface="+mn-lt"/>
-          <a:ea typeface="+mn-ea"/>
-          <a:cs typeface="+mn-cs"/>
-        </a:defRPr>
-      </a:lvl2pPr>
-      <a:lvl3pPr marL="1143000" indent="-228600" algn="l" defTabSz="457200" rtl="0" eaLnBrk="1" latinLnBrk="0" hangingPunct="1">
-        <a:spcBef>
-          <a:spcPct val="20000"/>
-        </a:spcBef>
-        <a:buFont typeface="Arial"/>
+        <a:buFont typeface="Arial" panose="020B0604020202020204" pitchFamily="34" charset="0"/>
         <a:buChar char="•"/>
         <a:defRPr sz="2400" kern="1200">
           <a:solidFill>
@@ -2887,42 +3093,15 @@
           <a:ea typeface="+mn-ea"/>
           <a:cs typeface="+mn-cs"/>
         </a:defRPr>
-      </a:lvl3pPr>
-      <a:lvl4pPr marL="1600200" indent="-228600" algn="l" defTabSz="457200" rtl="0" eaLnBrk="1" latinLnBrk="0" hangingPunct="1">
+      </a:lvl2pPr>
+      <a:lvl3pPr marL="1143000" indent="-228600" algn="l" defTabSz="914400" rtl="0" eaLnBrk="1" latinLnBrk="0" hangingPunct="1">
+        <a:lnSpc>
+          <a:spcPct val="90000"/>
+        </a:lnSpc>
         <a:spcBef>
-          <a:spcPct val="20000"/>
+          <a:spcPts val="500"/>
         </a:spcBef>
-        <a:buFont typeface="Arial"/>
-        <a:buChar char="–"/>
-        <a:defRPr sz="2000" kern="1200">
-          <a:solidFill>
-            <a:schemeClr val="tx1"/>
-          </a:solidFill>
-          <a:latin typeface="+mn-lt"/>
-          <a:ea typeface="+mn-ea"/>
-          <a:cs typeface="+mn-cs"/>
-        </a:defRPr>
-      </a:lvl4pPr>
-      <a:lvl5pPr marL="2057400" indent="-228600" algn="l" defTabSz="457200" rtl="0" eaLnBrk="1" latinLnBrk="0" hangingPunct="1">
-        <a:spcBef>
-          <a:spcPct val="20000"/>
-        </a:spcBef>
-        <a:buFont typeface="Arial"/>
-        <a:buChar char="»"/>
-        <a:defRPr sz="2000" kern="1200">
-          <a:solidFill>
-            <a:schemeClr val="tx1"/>
-          </a:solidFill>
-          <a:latin typeface="+mn-lt"/>
-          <a:ea typeface="+mn-ea"/>
-          <a:cs typeface="+mn-cs"/>
-        </a:defRPr>
-      </a:lvl5pPr>
-      <a:lvl6pPr marL="2514600" indent="-228600" algn="l" defTabSz="457200" rtl="0" eaLnBrk="1" latinLnBrk="0" hangingPunct="1">
-        <a:spcBef>
-          <a:spcPct val="20000"/>
-        </a:spcBef>
-        <a:buFont typeface="Arial"/>
+        <a:buFont typeface="Arial" panose="020B0604020202020204" pitchFamily="34" charset="0"/>
         <a:buChar char="•"/>
         <a:defRPr sz="2000" kern="1200">
           <a:solidFill>
@@ -2932,14 +3111,71 @@
           <a:ea typeface="+mn-ea"/>
           <a:cs typeface="+mn-cs"/>
         </a:defRPr>
+      </a:lvl3pPr>
+      <a:lvl4pPr marL="1600200" indent="-228600" algn="l" defTabSz="914400" rtl="0" eaLnBrk="1" latinLnBrk="0" hangingPunct="1">
+        <a:lnSpc>
+          <a:spcPct val="90000"/>
+        </a:lnSpc>
+        <a:spcBef>
+          <a:spcPts val="500"/>
+        </a:spcBef>
+        <a:buFont typeface="Arial" panose="020B0604020202020204" pitchFamily="34" charset="0"/>
+        <a:buChar char="•"/>
+        <a:defRPr sz="1800" kern="1200">
+          <a:solidFill>
+            <a:schemeClr val="tx1"/>
+          </a:solidFill>
+          <a:latin typeface="+mn-lt"/>
+          <a:ea typeface="+mn-ea"/>
+          <a:cs typeface="+mn-cs"/>
+        </a:defRPr>
+      </a:lvl4pPr>
+      <a:lvl5pPr marL="2057400" indent="-228600" algn="l" defTabSz="914400" rtl="0" eaLnBrk="1" latinLnBrk="0" hangingPunct="1">
+        <a:lnSpc>
+          <a:spcPct val="90000"/>
+        </a:lnSpc>
+        <a:spcBef>
+          <a:spcPts val="500"/>
+        </a:spcBef>
+        <a:buFont typeface="Arial" panose="020B0604020202020204" pitchFamily="34" charset="0"/>
+        <a:buChar char="•"/>
+        <a:defRPr sz="1800" kern="1200">
+          <a:solidFill>
+            <a:schemeClr val="tx1"/>
+          </a:solidFill>
+          <a:latin typeface="+mn-lt"/>
+          <a:ea typeface="+mn-ea"/>
+          <a:cs typeface="+mn-cs"/>
+        </a:defRPr>
+      </a:lvl5pPr>
+      <a:lvl6pPr marL="2514600" indent="-228600" algn="l" defTabSz="914400" rtl="0" eaLnBrk="1" latinLnBrk="0" hangingPunct="1">
+        <a:lnSpc>
+          <a:spcPct val="90000"/>
+        </a:lnSpc>
+        <a:spcBef>
+          <a:spcPts val="500"/>
+        </a:spcBef>
+        <a:buFont typeface="Arial" panose="020B0604020202020204" pitchFamily="34" charset="0"/>
+        <a:buChar char="•"/>
+        <a:defRPr sz="1800" kern="1200">
+          <a:solidFill>
+            <a:schemeClr val="tx1"/>
+          </a:solidFill>
+          <a:latin typeface="+mn-lt"/>
+          <a:ea typeface="+mn-ea"/>
+          <a:cs typeface="+mn-cs"/>
+        </a:defRPr>
       </a:lvl6pPr>
-      <a:lvl7pPr marL="2971800" indent="-228600" algn="l" defTabSz="457200" rtl="0" eaLnBrk="1" latinLnBrk="0" hangingPunct="1">
+      <a:lvl7pPr marL="2971800" indent="-228600" algn="l" defTabSz="914400" rtl="0" eaLnBrk="1" latinLnBrk="0" hangingPunct="1">
+        <a:lnSpc>
+          <a:spcPct val="90000"/>
+        </a:lnSpc>
         <a:spcBef>
-          <a:spcPct val="20000"/>
+          <a:spcPts val="500"/>
         </a:spcBef>
-        <a:buFont typeface="Arial"/>
+        <a:buFont typeface="Arial" panose="020B0604020202020204" pitchFamily="34" charset="0"/>
         <a:buChar char="•"/>
-        <a:defRPr sz="2000" kern="1200">
+        <a:defRPr sz="1800" kern="1200">
           <a:solidFill>
             <a:schemeClr val="tx1"/>
           </a:solidFill>
@@ -2948,13 +3184,16 @@
           <a:cs typeface="+mn-cs"/>
         </a:defRPr>
       </a:lvl7pPr>
-      <a:lvl8pPr marL="3429000" indent="-228600" algn="l" defTabSz="457200" rtl="0" eaLnBrk="1" latinLnBrk="0" hangingPunct="1">
+      <a:lvl8pPr marL="3429000" indent="-228600" algn="l" defTabSz="914400" rtl="0" eaLnBrk="1" latinLnBrk="0" hangingPunct="1">
+        <a:lnSpc>
+          <a:spcPct val="90000"/>
+        </a:lnSpc>
         <a:spcBef>
-          <a:spcPct val="20000"/>
+          <a:spcPts val="500"/>
         </a:spcBef>
-        <a:buFont typeface="Arial"/>
+        <a:buFont typeface="Arial" panose="020B0604020202020204" pitchFamily="34" charset="0"/>
         <a:buChar char="•"/>
-        <a:defRPr sz="2000" kern="1200">
+        <a:defRPr sz="1800" kern="1200">
           <a:solidFill>
             <a:schemeClr val="tx1"/>
           </a:solidFill>
@@ -2963,13 +3202,16 @@
           <a:cs typeface="+mn-cs"/>
         </a:defRPr>
       </a:lvl8pPr>
-      <a:lvl9pPr marL="3886200" indent="-228600" algn="l" defTabSz="457200" rtl="0" eaLnBrk="1" latinLnBrk="0" hangingPunct="1">
+      <a:lvl9pPr marL="3886200" indent="-228600" algn="l" defTabSz="914400" rtl="0" eaLnBrk="1" latinLnBrk="0" hangingPunct="1">
+        <a:lnSpc>
+          <a:spcPct val="90000"/>
+        </a:lnSpc>
         <a:spcBef>
-          <a:spcPct val="20000"/>
+          <a:spcPts val="500"/>
         </a:spcBef>
-        <a:buFont typeface="Arial"/>
+        <a:buFont typeface="Arial" panose="020B0604020202020204" pitchFamily="34" charset="0"/>
         <a:buChar char="•"/>
-        <a:defRPr sz="2000" kern="1200">
+        <a:defRPr sz="1800" kern="1200">
           <a:solidFill>
             <a:schemeClr val="tx1"/>
           </a:solidFill>
@@ -2983,7 +3225,7 @@
       <a:defPPr>
         <a:defRPr lang="en-US"/>
       </a:defPPr>
-      <a:lvl1pPr marL="0" algn="l" defTabSz="457200" rtl="0" eaLnBrk="1" latinLnBrk="0" hangingPunct="1">
+      <a:lvl1pPr marL="0" algn="l" defTabSz="914400" rtl="0" eaLnBrk="1" latinLnBrk="0" hangingPunct="1">
         <a:defRPr sz="1800" kern="1200">
           <a:solidFill>
             <a:schemeClr val="tx1"/>
@@ -2993,7 +3235,7 @@
           <a:cs typeface="+mn-cs"/>
         </a:defRPr>
       </a:lvl1pPr>
-      <a:lvl2pPr marL="457200" algn="l" defTabSz="457200" rtl="0" eaLnBrk="1" latinLnBrk="0" hangingPunct="1">
+      <a:lvl2pPr marL="457200" algn="l" defTabSz="914400" rtl="0" eaLnBrk="1" latinLnBrk="0" hangingPunct="1">
         <a:defRPr sz="1800" kern="1200">
           <a:solidFill>
             <a:schemeClr val="tx1"/>
@@ -3003,7 +3245,7 @@
           <a:cs typeface="+mn-cs"/>
         </a:defRPr>
       </a:lvl2pPr>
-      <a:lvl3pPr marL="914400" algn="l" defTabSz="457200" rtl="0" eaLnBrk="1" latinLnBrk="0" hangingPunct="1">
+      <a:lvl3pPr marL="914400" algn="l" defTabSz="914400" rtl="0" eaLnBrk="1" latinLnBrk="0" hangingPunct="1">
         <a:defRPr sz="1800" kern="1200">
           <a:solidFill>
             <a:schemeClr val="tx1"/>
@@ -3013,7 +3255,7 @@
           <a:cs typeface="+mn-cs"/>
         </a:defRPr>
       </a:lvl3pPr>
-      <a:lvl4pPr marL="1371600" algn="l" defTabSz="457200" rtl="0" eaLnBrk="1" latinLnBrk="0" hangingPunct="1">
+      <a:lvl4pPr marL="1371600" algn="l" defTabSz="914400" rtl="0" eaLnBrk="1" latinLnBrk="0" hangingPunct="1">
         <a:defRPr sz="1800" kern="1200">
           <a:solidFill>
             <a:schemeClr val="tx1"/>
@@ -3023,7 +3265,7 @@
           <a:cs typeface="+mn-cs"/>
         </a:defRPr>
       </a:lvl4pPr>
-      <a:lvl5pPr marL="1828800" algn="l" defTabSz="457200" rtl="0" eaLnBrk="1" latinLnBrk="0" hangingPunct="1">
+      <a:lvl5pPr marL="1828800" algn="l" defTabSz="914400" rtl="0" eaLnBrk="1" latinLnBrk="0" hangingPunct="1">
         <a:defRPr sz="1800" kern="1200">
           <a:solidFill>
             <a:schemeClr val="tx1"/>
@@ -3033,7 +3275,7 @@
           <a:cs typeface="+mn-cs"/>
         </a:defRPr>
       </a:lvl5pPr>
-      <a:lvl6pPr marL="2286000" algn="l" defTabSz="457200" rtl="0" eaLnBrk="1" latinLnBrk="0" hangingPunct="1">
+      <a:lvl6pPr marL="2286000" algn="l" defTabSz="914400" rtl="0" eaLnBrk="1" latinLnBrk="0" hangingPunct="1">
         <a:defRPr sz="1800" kern="1200">
           <a:solidFill>
             <a:schemeClr val="tx1"/>
@@ -3043,7 +3285,7 @@
           <a:cs typeface="+mn-cs"/>
         </a:defRPr>
       </a:lvl6pPr>
-      <a:lvl7pPr marL="2743200" algn="l" defTabSz="457200" rtl="0" eaLnBrk="1" latinLnBrk="0" hangingPunct="1">
+      <a:lvl7pPr marL="2743200" algn="l" defTabSz="914400" rtl="0" eaLnBrk="1" latinLnBrk="0" hangingPunct="1">
         <a:defRPr sz="1800" kern="1200">
           <a:solidFill>
             <a:schemeClr val="tx1"/>
@@ -3053,7 +3295,7 @@
           <a:cs typeface="+mn-cs"/>
         </a:defRPr>
       </a:lvl7pPr>
-      <a:lvl8pPr marL="3200400" algn="l" defTabSz="457200" rtl="0" eaLnBrk="1" latinLnBrk="0" hangingPunct="1">
+      <a:lvl8pPr marL="3200400" algn="l" defTabSz="914400" rtl="0" eaLnBrk="1" latinLnBrk="0" hangingPunct="1">
         <a:defRPr sz="1800" kern="1200">
           <a:solidFill>
             <a:schemeClr val="tx1"/>
@@ -3063,7 +3305,7 @@
           <a:cs typeface="+mn-cs"/>
         </a:defRPr>
       </a:lvl8pPr>
-      <a:lvl9pPr marL="3657600" algn="l" defTabSz="457200" rtl="0" eaLnBrk="1" latinLnBrk="0" hangingPunct="1">
+      <a:lvl9pPr marL="3657600" algn="l" defTabSz="914400" rtl="0" eaLnBrk="1" latinLnBrk="0" hangingPunct="1">
         <a:defRPr sz="1800" kern="1200">
           <a:solidFill>
             <a:schemeClr val="tx1"/>
@@ -3088,9 +3330,351 @@
         <p:nvPr/>
       </p:nvGrpSpPr>
       <p:grpSpPr/>
+      <p:sp>
+        <p:nvSpPr>
+          <p:cNvPr id="2" name="Title 1"/>
+          <p:cNvSpPr>
+            <a:spLocks noGrp="1"/>
+          </p:cNvSpPr>
+          <p:nvPr>
+            <p:ph type="title"/>
+          </p:nvPr>
+        </p:nvSpPr>
+        <p:spPr/>
+        <p:txBody>
+          <a:bodyPr/>
+          <a:lstStyle/>
+          <a:p/>
+        </p:txBody>
+      </p:sp>
+      <p:sp>
+        <p:nvSpPr>
+          <p:cNvPr id="3" name="Content Placeholder 2"/>
+          <p:cNvSpPr>
+            <a:spLocks noGrp="1"/>
+          </p:cNvSpPr>
+          <p:nvPr>
+            <p:ph type="obj" idx="1"/>
+          </p:nvPr>
+        </p:nvSpPr>
+        <p:spPr/>
+        <p:txBody>
+          <a:bodyPr/>
+          <a:lstStyle/>
+          <a:p/>
+        </p:txBody>
+      </p:sp>
+      <p:sp>
+        <p:nvSpPr>
+          <p:cNvPr id="4" name="TextBox 3"/>
+          <p:cNvSpPr txBox="1"/>
+          <p:nvPr/>
+        </p:nvSpPr>
+        <p:spPr>
+          <a:xfrm>
+            <a:off x="1050645" y="633770"/>
+            <a:ext cx="3132551" cy="400141"/>
+          </a:xfrm>
+          <a:prstGeom prst="rect">
+            <a:avLst/>
+          </a:prstGeom>
+          <a:noFill/>
+        </p:spPr>
+        <p:txBody>
+          <a:bodyPr wrap="square">
+            <a:spAutoFit/>
+          </a:bodyPr>
+          <a:lstStyle/>
+          <a:p>
+            <a:pPr>
+              <a:buNone/>
+            </a:pPr>
+            <a:r>
+              <a:rPr sz="2000">
+                <a:solidFill>
+                  <a:schemeClr val="accent1"/>
+                </a:solidFill>
+                <a:latin typeface="Abadi"/>
+              </a:rPr>
+              <a:t>What they studied</a:t>
+            </a:r>
+          </a:p>
+        </p:txBody>
+      </p:sp>
+      <p:sp>
+        <p:nvSpPr>
+          <p:cNvPr id="5" name="downArrow 4"/>
+          <p:cNvSpPr/>
+          <p:nvPr/>
+        </p:nvSpPr>
+        <p:spPr>
+          <a:xfrm>
+            <a:off x="2815071" y="590062"/>
+            <a:ext cx="245059" cy="254568"/>
+          </a:xfrm>
+          <a:prstGeom prst="downArrow">
+            <a:avLst/>
+          </a:prstGeom>
+        </p:spPr>
+        <p:style>
+          <a:lnRef idx="2">
+            <a:schemeClr val="accent1">
+              <a:shade val="50000"/>
+            </a:schemeClr>
+          </a:lnRef>
+          <a:fillRef idx="1">
+            <a:schemeClr val="accent1"/>
+          </a:fillRef>
+          <a:effectRef idx="0">
+            <a:schemeClr val="accent1"/>
+          </a:effectRef>
+          <a:fontRef idx="minor">
+            <a:schemeClr val="lt1"/>
+          </a:fontRef>
+        </p:style>
+        <p:txBody>
+          <a:bodyPr rtlCol="0" anchor="ctr"/>
+          <a:lstStyle/>
+          <a:p>
+            <a:pPr algn="ctr"/>
+          </a:p>
+        </p:txBody>
+      </p:sp>
+      <p:sp>
+        <p:nvSpPr>
+          <p:cNvPr id="6" name="downArrow 5"/>
+          <p:cNvSpPr/>
+          <p:nvPr/>
+        </p:nvSpPr>
+        <p:spPr>
+          <a:xfrm>
+            <a:off x="3112891" y="590062"/>
+            <a:ext cx="245059" cy="254568"/>
+          </a:xfrm>
+          <a:prstGeom prst="downArrow">
+            <a:avLst/>
+          </a:prstGeom>
+        </p:spPr>
+        <p:style>
+          <a:lnRef idx="2">
+            <a:schemeClr val="accent1">
+              <a:shade val="50000"/>
+            </a:schemeClr>
+          </a:lnRef>
+          <a:fillRef idx="1">
+            <a:schemeClr val="accent1"/>
+          </a:fillRef>
+          <a:effectRef idx="0">
+            <a:schemeClr val="accent1"/>
+          </a:effectRef>
+          <a:fontRef idx="minor">
+            <a:schemeClr val="lt1"/>
+          </a:fontRef>
+        </p:style>
+        <p:txBody>
+          <a:bodyPr rtlCol="0" anchor="ctr"/>
+          <a:lstStyle/>
+          <a:p>
+            <a:pPr algn="ctr"/>
+          </a:p>
+        </p:txBody>
+      </p:sp>
+      <p:sp>
+        <p:nvSpPr>
+          <p:cNvPr id="7" name="downArrow 6"/>
+          <p:cNvSpPr/>
+          <p:nvPr/>
+        </p:nvSpPr>
+        <p:spPr>
+          <a:xfrm>
+            <a:off x="3410712" y="590062"/>
+            <a:ext cx="245059" cy="254568"/>
+          </a:xfrm>
+          <a:prstGeom prst="downArrow">
+            <a:avLst/>
+          </a:prstGeom>
+        </p:spPr>
+        <p:style>
+          <a:lnRef idx="2">
+            <a:schemeClr val="accent1">
+              <a:shade val="50000"/>
+            </a:schemeClr>
+          </a:lnRef>
+          <a:fillRef idx="1">
+            <a:schemeClr val="accent1"/>
+          </a:fillRef>
+          <a:effectRef idx="0">
+            <a:schemeClr val="accent1"/>
+          </a:effectRef>
+          <a:fontRef idx="minor">
+            <a:schemeClr val="lt1"/>
+          </a:fontRef>
+        </p:style>
+        <p:txBody>
+          <a:bodyPr rtlCol="0" anchor="ctr"/>
+          <a:lstStyle/>
+          <a:p>
+            <a:pPr algn="ctr"/>
+          </a:p>
+        </p:txBody>
+      </p:sp>
+      <p:sp>
+        <p:nvSpPr>
+          <p:cNvPr id="8" name="TextBox 7"/>
+          <p:cNvSpPr txBox="1"/>
+          <p:nvPr/>
+        </p:nvSpPr>
+        <p:spPr>
+          <a:xfrm>
+            <a:off x="5123840" y="634959"/>
+            <a:ext cx="1276959" cy="400141"/>
+          </a:xfrm>
+          <a:prstGeom prst="rect">
+            <a:avLst/>
+          </a:prstGeom>
+          <a:noFill/>
+        </p:spPr>
+        <p:txBody>
+          <a:bodyPr wrap="square">
+            <a:spAutoFit/>
+          </a:bodyPr>
+          <a:lstStyle/>
+          <a:p>
+            <a:pPr>
+              <a:buNone/>
+            </a:pPr>
+            <a:r>
+              <a:rPr sz="2000">
+                <a:solidFill>
+                  <a:schemeClr val="accent1"/>
+                </a:solidFill>
+                <a:latin typeface="Abadi"/>
+              </a:rPr>
+              <a:t>The exam</a:t>
+            </a:r>
+          </a:p>
+        </p:txBody>
+      </p:sp>
+      <p:sp>
+        <p:nvSpPr>
+          <p:cNvPr id="9" name="downArrow 8"/>
+          <p:cNvSpPr/>
+          <p:nvPr/>
+        </p:nvSpPr>
+        <p:spPr>
+          <a:xfrm>
+            <a:off x="2485064" y="590062"/>
+            <a:ext cx="245059" cy="254568"/>
+          </a:xfrm>
+          <a:prstGeom prst="downArrow">
+            <a:avLst/>
+          </a:prstGeom>
+        </p:spPr>
+        <p:style>
+          <a:lnRef idx="2">
+            <a:schemeClr val="accent1">
+              <a:shade val="50000"/>
+            </a:schemeClr>
+          </a:lnRef>
+          <a:fillRef idx="1">
+            <a:schemeClr val="accent1"/>
+          </a:fillRef>
+          <a:effectRef idx="0">
+            <a:schemeClr val="accent1"/>
+          </a:effectRef>
+          <a:fontRef idx="minor">
+            <a:schemeClr val="lt1"/>
+          </a:fontRef>
+        </p:style>
+        <p:txBody>
+          <a:bodyPr rtlCol="0" anchor="ctr"/>
+          <a:lstStyle/>
+          <a:p>
+            <a:pPr algn="ctr"/>
+          </a:p>
+        </p:txBody>
+      </p:sp>
+      <p:sp>
+        <p:nvSpPr>
+          <p:cNvPr id="10" name="downArrow 9"/>
+          <p:cNvSpPr/>
+          <p:nvPr/>
+        </p:nvSpPr>
+        <p:spPr>
+          <a:xfrm>
+            <a:off x="2782976" y="590062"/>
+            <a:ext cx="245059" cy="254568"/>
+          </a:xfrm>
+          <a:prstGeom prst="downArrow">
+            <a:avLst/>
+          </a:prstGeom>
+        </p:spPr>
+        <p:style>
+          <a:lnRef idx="2">
+            <a:schemeClr val="accent1">
+              <a:shade val="50000"/>
+            </a:schemeClr>
+          </a:lnRef>
+          <a:fillRef idx="1">
+            <a:schemeClr val="accent1"/>
+          </a:fillRef>
+          <a:effectRef idx="0">
+            <a:schemeClr val="accent1"/>
+          </a:effectRef>
+          <a:fontRef idx="minor">
+            <a:schemeClr val="lt1"/>
+          </a:fontRef>
+        </p:style>
+        <p:txBody>
+          <a:bodyPr rtlCol="0" anchor="ctr"/>
+          <a:lstStyle/>
+          <a:p>
+            <a:pPr algn="ctr"/>
+          </a:p>
+        </p:txBody>
+      </p:sp>
+      <p:sp>
+        <p:nvSpPr>
+          <p:cNvPr id="11" name="downArrow 10"/>
+          <p:cNvSpPr/>
+          <p:nvPr/>
+        </p:nvSpPr>
+        <p:spPr>
+          <a:xfrm>
+            <a:off x="3080796" y="590062"/>
+            <a:ext cx="245059" cy="254568"/>
+          </a:xfrm>
+          <a:prstGeom prst="downArrow">
+            <a:avLst/>
+          </a:prstGeom>
+        </p:spPr>
+        <p:style>
+          <a:lnRef idx="2">
+            <a:schemeClr val="accent1">
+              <a:shade val="50000"/>
+            </a:schemeClr>
+          </a:lnRef>
+          <a:fillRef idx="1">
+            <a:schemeClr val="accent1"/>
+          </a:fillRef>
+          <a:effectRef idx="0">
+            <a:schemeClr val="accent1"/>
+          </a:effectRef>
+          <a:fontRef idx="minor">
+            <a:schemeClr val="lt1"/>
+          </a:fontRef>
+        </p:style>
+        <p:txBody>
+          <a:bodyPr rtlCol="0" anchor="ctr"/>
+          <a:lstStyle/>
+          <a:p>
+            <a:pPr algn="ctr"/>
+          </a:p>
+        </p:txBody>
+      </p:sp>
       <p:pic>
         <p:nvPicPr>
-          <p:cNvPr id="2" name="Picture 1" descr="image1.jpg"/>
+          <p:cNvPr id="12" name="Picture 11" descr="image1.jpg"/>
           <p:cNvPicPr>
             <a:picLocks noChangeAspect="1"/>
           </p:cNvPicPr>
@@ -3104,8 +3688,8 @@
         </p:blipFill>
         <p:spPr>
           <a:xfrm>
-            <a:off x="638175" y="309372"/>
-            <a:ext cx="4514850" cy="6477000"/>
+            <a:off x="638159" y="1061801"/>
+            <a:ext cx="4003060" cy="5742889"/>
           </a:xfrm>
           <a:prstGeom prst="rect">
             <a:avLst/>
@@ -3114,7 +3698,7 @@
       </p:pic>
       <p:pic>
         <p:nvPicPr>
-          <p:cNvPr id="3" name="Picture 2" descr="image2.jpg"/>
+          <p:cNvPr id="13" name="Picture 12" descr="image2.jpg"/>
           <p:cNvPicPr>
             <a:picLocks noChangeAspect="1"/>
           </p:cNvPicPr>
@@ -3128,314 +3712,14 @@
         </p:blipFill>
         <p:spPr>
           <a:xfrm>
-            <a:off x="5153025" y="309372"/>
-            <a:ext cx="4514851" cy="6456362"/>
+            <a:off x="4641220" y="1061801"/>
+            <a:ext cx="4003060" cy="5724692"/>
           </a:xfrm>
           <a:prstGeom prst="rect">
             <a:avLst/>
           </a:prstGeom>
         </p:spPr>
       </p:pic>
-      <p:sp>
-        <p:nvSpPr>
-          <p:cNvPr id="4" name="Rectangle 3"/>
-          <p:cNvSpPr/>
-          <p:nvPr/>
-        </p:nvSpPr>
-        <p:spPr>
-          <a:xfrm>
-            <a:off x="638176" y="518474"/>
-            <a:ext cx="3132546" cy="400110"/>
-          </a:xfrm>
-          <a:prstGeom prst="rect">
-            <a:avLst/>
-          </a:prstGeom>
-        </p:spPr>
-        <p:style>
-          <a:lnRef idx="1">
-            <a:schemeClr val="accent1"/>
-          </a:lnRef>
-          <a:fillRef idx="3">
-            <a:schemeClr val="accent1"/>
-          </a:fillRef>
-          <a:effectRef idx="2">
-            <a:schemeClr val="accent1"/>
-          </a:effectRef>
-          <a:fontRef idx="minor">
-            <a:schemeClr val="lt1"/>
-          </a:fontRef>
-        </p:style>
-        <p:txBody>
-          <a:bodyPr rtlCol="0" anchor="ctr"/>
-          <a:lstStyle/>
-          <a:p>
-            <a:r>
-              <a:t>What they studied</a:t>
-            </a:r>
-          </a:p>
-        </p:txBody>
-      </p:sp>
-      <p:sp>
-        <p:nvSpPr>
-          <p:cNvPr id="5" name="downArrow 4"/>
-          <p:cNvSpPr/>
-          <p:nvPr/>
-        </p:nvSpPr>
-        <p:spPr>
-          <a:xfrm>
-            <a:off x="2815042" y="590104"/>
-            <a:ext cx="245097" cy="254524"/>
-          </a:xfrm>
-          <a:prstGeom prst="downArrow">
-            <a:avLst/>
-          </a:prstGeom>
-        </p:spPr>
-        <p:style>
-          <a:lnRef idx="1">
-            <a:schemeClr val="accent1"/>
-          </a:lnRef>
-          <a:fillRef idx="3">
-            <a:schemeClr val="accent1"/>
-          </a:fillRef>
-          <a:effectRef idx="2">
-            <a:schemeClr val="accent1"/>
-          </a:effectRef>
-          <a:fontRef idx="minor">
-            <a:schemeClr val="lt1"/>
-          </a:fontRef>
-        </p:style>
-        <p:txBody>
-          <a:bodyPr rtlCol="0" anchor="ctr"/>
-          <a:lstStyle/>
-          <a:p>
-            <a:pPr algn="ctr"/>
-          </a:p>
-        </p:txBody>
-      </p:sp>
-      <p:sp>
-        <p:nvSpPr>
-          <p:cNvPr id="6" name="downArrow 5"/>
-          <p:cNvSpPr/>
-          <p:nvPr/>
-        </p:nvSpPr>
-        <p:spPr>
-          <a:xfrm>
-            <a:off x="3112880" y="590104"/>
-            <a:ext cx="245097" cy="254524"/>
-          </a:xfrm>
-          <a:prstGeom prst="downArrow">
-            <a:avLst/>
-          </a:prstGeom>
-        </p:spPr>
-        <p:style>
-          <a:lnRef idx="1">
-            <a:schemeClr val="accent1"/>
-          </a:lnRef>
-          <a:fillRef idx="3">
-            <a:schemeClr val="accent1"/>
-          </a:fillRef>
-          <a:effectRef idx="2">
-            <a:schemeClr val="accent1"/>
-          </a:effectRef>
-          <a:fontRef idx="minor">
-            <a:schemeClr val="lt1"/>
-          </a:fontRef>
-        </p:style>
-        <p:txBody>
-          <a:bodyPr rtlCol="0" anchor="ctr"/>
-          <a:lstStyle/>
-          <a:p>
-            <a:pPr algn="ctr"/>
-          </a:p>
-        </p:txBody>
-      </p:sp>
-      <p:sp>
-        <p:nvSpPr>
-          <p:cNvPr id="7" name="downArrow 6"/>
-          <p:cNvSpPr/>
-          <p:nvPr/>
-        </p:nvSpPr>
-        <p:spPr>
-          <a:xfrm>
-            <a:off x="3410717" y="590104"/>
-            <a:ext cx="245097" cy="254524"/>
-          </a:xfrm>
-          <a:prstGeom prst="downArrow">
-            <a:avLst/>
-          </a:prstGeom>
-        </p:spPr>
-        <p:style>
-          <a:lnRef idx="1">
-            <a:schemeClr val="accent1"/>
-          </a:lnRef>
-          <a:fillRef idx="3">
-            <a:schemeClr val="accent1"/>
-          </a:fillRef>
-          <a:effectRef idx="2">
-            <a:schemeClr val="accent1"/>
-          </a:effectRef>
-          <a:fontRef idx="minor">
-            <a:schemeClr val="lt1"/>
-          </a:fontRef>
-        </p:style>
-        <p:txBody>
-          <a:bodyPr rtlCol="0" anchor="ctr"/>
-          <a:lstStyle/>
-          <a:p>
-            <a:pPr algn="ctr"/>
-          </a:p>
-        </p:txBody>
-      </p:sp>
-      <p:sp>
-        <p:nvSpPr>
-          <p:cNvPr id="8" name="Rectangle 7"/>
-          <p:cNvSpPr/>
-          <p:nvPr/>
-        </p:nvSpPr>
-        <p:spPr>
-          <a:xfrm>
-            <a:off x="1233903" y="518474"/>
-            <a:ext cx="1276918" cy="400110"/>
-          </a:xfrm>
-          <a:prstGeom prst="rect">
-            <a:avLst/>
-          </a:prstGeom>
-        </p:spPr>
-        <p:style>
-          <a:lnRef idx="1">
-            <a:schemeClr val="accent1"/>
-          </a:lnRef>
-          <a:fillRef idx="3">
-            <a:schemeClr val="accent1"/>
-          </a:fillRef>
-          <a:effectRef idx="2">
-            <a:schemeClr val="accent1"/>
-          </a:effectRef>
-          <a:fontRef idx="minor">
-            <a:schemeClr val="lt1"/>
-          </a:fontRef>
-        </p:style>
-        <p:txBody>
-          <a:bodyPr rtlCol="0" anchor="ctr"/>
-          <a:lstStyle/>
-          <a:p>
-            <a:r>
-              <a:t>The exam</a:t>
-            </a:r>
-          </a:p>
-        </p:txBody>
-      </p:sp>
-      <p:sp>
-        <p:nvSpPr>
-          <p:cNvPr id="9" name="downArrow 8"/>
-          <p:cNvSpPr/>
-          <p:nvPr/>
-        </p:nvSpPr>
-        <p:spPr>
-          <a:xfrm>
-            <a:off x="2485100" y="590104"/>
-            <a:ext cx="245097" cy="254524"/>
-          </a:xfrm>
-          <a:prstGeom prst="downArrow">
-            <a:avLst/>
-          </a:prstGeom>
-        </p:spPr>
-        <p:style>
-          <a:lnRef idx="1">
-            <a:schemeClr val="accent1"/>
-          </a:lnRef>
-          <a:fillRef idx="3">
-            <a:schemeClr val="accent1"/>
-          </a:fillRef>
-          <a:effectRef idx="2">
-            <a:schemeClr val="accent1"/>
-          </a:effectRef>
-          <a:fontRef idx="minor">
-            <a:schemeClr val="lt1"/>
-          </a:fontRef>
-        </p:style>
-        <p:txBody>
-          <a:bodyPr rtlCol="0" anchor="ctr"/>
-          <a:lstStyle/>
-          <a:p>
-            <a:pPr algn="ctr"/>
-          </a:p>
-        </p:txBody>
-      </p:sp>
-      <p:sp>
-        <p:nvSpPr>
-          <p:cNvPr id="10" name="downArrow 9"/>
-          <p:cNvSpPr/>
-          <p:nvPr/>
-        </p:nvSpPr>
-        <p:spPr>
-          <a:xfrm>
-            <a:off x="2782938" y="590104"/>
-            <a:ext cx="245097" cy="254524"/>
-          </a:xfrm>
-          <a:prstGeom prst="downArrow">
-            <a:avLst/>
-          </a:prstGeom>
-        </p:spPr>
-        <p:style>
-          <a:lnRef idx="1">
-            <a:schemeClr val="accent1"/>
-          </a:lnRef>
-          <a:fillRef idx="3">
-            <a:schemeClr val="accent1"/>
-          </a:fillRef>
-          <a:effectRef idx="2">
-            <a:schemeClr val="accent1"/>
-          </a:effectRef>
-          <a:fontRef idx="minor">
-            <a:schemeClr val="lt1"/>
-          </a:fontRef>
-        </p:style>
-        <p:txBody>
-          <a:bodyPr rtlCol="0" anchor="ctr"/>
-          <a:lstStyle/>
-          <a:p>
-            <a:pPr algn="ctr"/>
-          </a:p>
-        </p:txBody>
-      </p:sp>
-      <p:sp>
-        <p:nvSpPr>
-          <p:cNvPr id="11" name="downArrow 10"/>
-          <p:cNvSpPr/>
-          <p:nvPr/>
-        </p:nvSpPr>
-        <p:spPr>
-          <a:xfrm>
-            <a:off x="3080775" y="590104"/>
-            <a:ext cx="245097" cy="254524"/>
-          </a:xfrm>
-          <a:prstGeom prst="downArrow">
-            <a:avLst/>
-          </a:prstGeom>
-        </p:spPr>
-        <p:style>
-          <a:lnRef idx="1">
-            <a:schemeClr val="accent1"/>
-          </a:lnRef>
-          <a:fillRef idx="3">
-            <a:schemeClr val="accent1"/>
-          </a:fillRef>
-          <a:effectRef idx="2">
-            <a:schemeClr val="accent1"/>
-          </a:effectRef>
-          <a:fontRef idx="minor">
-            <a:schemeClr val="lt1"/>
-          </a:fontRef>
-        </p:style>
-        <p:txBody>
-          <a:bodyPr rtlCol="0" anchor="ctr"/>
-          <a:lstStyle/>
-          <a:p>
-            <a:pPr algn="ctr"/>
-          </a:p>
-        </p:txBody>
-      </p:sp>
     </p:spTree>
   </p:cSld>
   <p:clrMapOvr>
@@ -3455,44 +3739,44 @@
         <a:sysClr val="window" lastClr="FFFFFF"/>
       </a:lt1>
       <a:dk2>
-        <a:srgbClr val="1F497D"/>
+        <a:srgbClr val="44546A"/>
       </a:dk2>
       <a:lt2>
-        <a:srgbClr val="EEECE1"/>
+        <a:srgbClr val="E7E6E6"/>
       </a:lt2>
       <a:accent1>
-        <a:srgbClr val="4F81BD"/>
+        <a:srgbClr val="4472C4"/>
       </a:accent1>
       <a:accent2>
-        <a:srgbClr val="C0504D"/>
+        <a:srgbClr val="ED7D31"/>
       </a:accent2>
       <a:accent3>
-        <a:srgbClr val="9BBB59"/>
+        <a:srgbClr val="A5A5A5"/>
       </a:accent3>
       <a:accent4>
-        <a:srgbClr val="8064A2"/>
+        <a:srgbClr val="FFC000"/>
       </a:accent4>
       <a:accent5>
-        <a:srgbClr val="4BACC6"/>
+        <a:srgbClr val="5B9BD5"/>
       </a:accent5>
       <a:accent6>
-        <a:srgbClr val="F79646"/>
+        <a:srgbClr val="70AD47"/>
       </a:accent6>
       <a:hlink>
-        <a:srgbClr val="0000FF"/>
+        <a:srgbClr val="0563C1"/>
       </a:hlink>
       <a:folHlink>
-        <a:srgbClr val="800080"/>
+        <a:srgbClr val="954F72"/>
       </a:folHlink>
     </a:clrScheme>
     <a:fontScheme name="Office">
       <a:majorFont>
-        <a:latin typeface="Calibri"/>
+        <a:latin typeface="Calibri Light" panose="020F0302020204030204"/>
         <a:ea typeface=""/>
         <a:cs typeface=""/>
-        <a:font script="Jpan" typeface="ＭＳ Ｐゴシック"/>
+        <a:font script="Jpan" typeface="游ゴシック Light"/>
         <a:font script="Hang" typeface="맑은 고딕"/>
-        <a:font script="Hans" typeface="宋体"/>
+        <a:font script="Hans" typeface="等线 Light"/>
         <a:font script="Hant" typeface="新細明體"/>
         <a:font script="Arab" typeface="Times New Roman"/>
         <a:font script="Hebr" typeface="Times New Roman"/>
@@ -3520,14 +3804,31 @@
         <a:font script="Viet" typeface="Times New Roman"/>
         <a:font script="Uigh" typeface="Microsoft Uighur"/>
         <a:font script="Geor" typeface="Sylfaen"/>
+        <a:font script="Armn" typeface="Arial"/>
+        <a:font script="Bugi" typeface="Leelawadee UI"/>
+        <a:font script="Bopo" typeface="Microsoft JhengHei"/>
+        <a:font script="Java" typeface="Javanese Text"/>
+        <a:font script="Lisu" typeface="Segoe UI"/>
+        <a:font script="Mymr" typeface="Myanmar Text"/>
+        <a:font script="Nkoo" typeface="Ebrima"/>
+        <a:font script="Olck" typeface="Nirmala UI"/>
+        <a:font script="Osma" typeface="Ebrima"/>
+        <a:font script="Phag" typeface="Phagspa"/>
+        <a:font script="Syrn" typeface="Estrangelo Edessa"/>
+        <a:font script="Syrj" typeface="Estrangelo Edessa"/>
+        <a:font script="Syre" typeface="Estrangelo Edessa"/>
+        <a:font script="Sora" typeface="Nirmala UI"/>
+        <a:font script="Tale" typeface="Microsoft Tai Le"/>
+        <a:font script="Talu" typeface="Microsoft New Tai Lue"/>
+        <a:font script="Tfng" typeface="Ebrima"/>
       </a:majorFont>
       <a:minorFont>
-        <a:latin typeface="Calibri"/>
+        <a:latin typeface="Calibri" panose="020F0502020204030204"/>
         <a:ea typeface=""/>
         <a:cs typeface=""/>
-        <a:font script="Jpan" typeface="ＭＳ Ｐゴシック"/>
+        <a:font script="Jpan" typeface="游ゴシック"/>
         <a:font script="Hang" typeface="맑은 고딕"/>
-        <a:font script="Hans" typeface="宋体"/>
+        <a:font script="Hans" typeface="等线"/>
         <a:font script="Hant" typeface="新細明體"/>
         <a:font script="Arab" typeface="Arial"/>
         <a:font script="Hebr" typeface="Arial"/>
@@ -3555,6 +3856,23 @@
         <a:font script="Viet" typeface="Arial"/>
         <a:font script="Uigh" typeface="Microsoft Uighur"/>
         <a:font script="Geor" typeface="Sylfaen"/>
+        <a:font script="Armn" typeface="Arial"/>
+        <a:font script="Bugi" typeface="Leelawadee UI"/>
+        <a:font script="Bopo" typeface="Microsoft JhengHei"/>
+        <a:font script="Java" typeface="Javanese Text"/>
+        <a:font script="Lisu" typeface="Segoe UI"/>
+        <a:font script="Mymr" typeface="Myanmar Text"/>
+        <a:font script="Nkoo" typeface="Ebrima"/>
+        <a:font script="Olck" typeface="Nirmala UI"/>
+        <a:font script="Osma" typeface="Ebrima"/>
+        <a:font script="Phag" typeface="Phagspa"/>
+        <a:font script="Syrn" typeface="Estrangelo Edessa"/>
+        <a:font script="Syrj" typeface="Estrangelo Edessa"/>
+        <a:font script="Syre" typeface="Estrangelo Edessa"/>
+        <a:font script="Sora" typeface="Nirmala UI"/>
+        <a:font script="Tale" typeface="Microsoft Tai Le"/>
+        <a:font script="Talu" typeface="Microsoft New Tai Lue"/>
+        <a:font script="Tfng" typeface="Ebrima"/>
       </a:minorFont>
     </a:fontScheme>
     <a:fmtScheme name="Office">
@@ -3566,200 +3884,141 @@
           <a:gsLst>
             <a:gs pos="0">
               <a:schemeClr val="phClr">
-                <a:tint val="50000"/>
-                <a:satMod val="300000"/>
+                <a:lumMod val="110000"/>
+                <a:satMod val="105000"/>
+                <a:tint val="67000"/>
               </a:schemeClr>
             </a:gs>
-            <a:gs pos="35000">
+            <a:gs pos="50000">
               <a:schemeClr val="phClr">
-                <a:tint val="37000"/>
-                <a:satMod val="300000"/>
+                <a:lumMod val="105000"/>
+                <a:satMod val="103000"/>
+                <a:tint val="73000"/>
               </a:schemeClr>
             </a:gs>
             <a:gs pos="100000">
               <a:schemeClr val="phClr">
-                <a:tint val="15000"/>
-                <a:satMod val="350000"/>
+                <a:lumMod val="105000"/>
+                <a:satMod val="109000"/>
+                <a:tint val="81000"/>
               </a:schemeClr>
             </a:gs>
           </a:gsLst>
-          <a:lin ang="16200000" scaled="1"/>
+          <a:lin ang="5400000" scaled="0"/>
         </a:gradFill>
         <a:gradFill rotWithShape="1">
           <a:gsLst>
             <a:gs pos="0">
               <a:schemeClr val="phClr">
-                <a:tint val="100000"/>
+                <a:satMod val="103000"/>
+                <a:lumMod val="102000"/>
+                <a:tint val="94000"/>
+              </a:schemeClr>
+            </a:gs>
+            <a:gs pos="50000">
+              <a:schemeClr val="phClr">
+                <a:satMod val="110000"/>
+                <a:lumMod val="100000"/>
                 <a:shade val="100000"/>
-                <a:satMod val="130000"/>
               </a:schemeClr>
             </a:gs>
             <a:gs pos="100000">
               <a:schemeClr val="phClr">
-                <a:tint val="50000"/>
-                <a:shade val="100000"/>
-                <a:satMod val="350000"/>
+                <a:lumMod val="99000"/>
+                <a:satMod val="120000"/>
+                <a:shade val="78000"/>
               </a:schemeClr>
             </a:gs>
           </a:gsLst>
-          <a:lin ang="16200000" scaled="0"/>
+          <a:lin ang="5400000" scaled="0"/>
         </a:gradFill>
       </a:fillStyleLst>
       <a:lnStyleLst>
-        <a:ln w="9525" cap="flat" cmpd="sng" algn="ctr">
-          <a:solidFill>
-            <a:schemeClr val="phClr">
-              <a:shade val="95000"/>
-              <a:satMod val="105000"/>
-            </a:schemeClr>
-          </a:solidFill>
-          <a:prstDash val="solid"/>
-        </a:ln>
-        <a:ln w="25400" cap="flat" cmpd="sng" algn="ctr">
+        <a:ln w="6350" cap="flat" cmpd="sng" algn="ctr">
           <a:solidFill>
             <a:schemeClr val="phClr"/>
           </a:solidFill>
           <a:prstDash val="solid"/>
+          <a:miter lim="800000"/>
         </a:ln>
-        <a:ln w="38100" cap="flat" cmpd="sng" algn="ctr">
+        <a:ln w="12700" cap="flat" cmpd="sng" algn="ctr">
           <a:solidFill>
             <a:schemeClr val="phClr"/>
           </a:solidFill>
           <a:prstDash val="solid"/>
+          <a:miter lim="800000"/>
+        </a:ln>
+        <a:ln w="19050" cap="flat" cmpd="sng" algn="ctr">
+          <a:solidFill>
+            <a:schemeClr val="phClr"/>
+          </a:solidFill>
+          <a:prstDash val="solid"/>
+          <a:miter lim="800000"/>
         </a:ln>
       </a:lnStyleLst>
       <a:effectStyleLst>
         <a:effectStyle>
+          <a:effectLst/>
+        </a:effectStyle>
+        <a:effectStyle>
+          <a:effectLst/>
+        </a:effectStyle>
+        <a:effectStyle>
           <a:effectLst>
-            <a:outerShdw blurRad="40000" dist="20000" dir="5400000" rotWithShape="0">
+            <a:outerShdw blurRad="57150" dist="19050" dir="5400000" algn="ctr" rotWithShape="0">
               <a:srgbClr val="000000">
-                <a:alpha val="38000"/>
+                <a:alpha val="63000"/>
               </a:srgbClr>
             </a:outerShdw>
           </a:effectLst>
-        </a:effectStyle>
-        <a:effectStyle>
-          <a:effectLst>
-            <a:outerShdw blurRad="40000" dist="23000" dir="5400000" rotWithShape="0">
-              <a:srgbClr val="000000">
-                <a:alpha val="35000"/>
-              </a:srgbClr>
-            </a:outerShdw>
-          </a:effectLst>
-        </a:effectStyle>
-        <a:effectStyle>
-          <a:effectLst>
-            <a:outerShdw blurRad="40000" dist="23000" dir="5400000" rotWithShape="0">
-              <a:srgbClr val="000000">
-                <a:alpha val="35000"/>
-              </a:srgbClr>
-            </a:outerShdw>
-          </a:effectLst>
-          <a:scene3d>
-            <a:camera prst="orthographicFront">
-              <a:rot lat="0" lon="0" rev="0"/>
-            </a:camera>
-            <a:lightRig rig="threePt" dir="t">
-              <a:rot lat="0" lon="0" rev="1200000"/>
-            </a:lightRig>
-          </a:scene3d>
-          <a:sp3d>
-            <a:bevelT w="63500" h="25400"/>
-          </a:sp3d>
         </a:effectStyle>
       </a:effectStyleLst>
       <a:bgFillStyleLst>
         <a:solidFill>
           <a:schemeClr val="phClr"/>
         </a:solidFill>
+        <a:solidFill>
+          <a:schemeClr val="phClr">
+            <a:tint val="95000"/>
+            <a:satMod val="170000"/>
+          </a:schemeClr>
+        </a:solidFill>
         <a:gradFill rotWithShape="1">
           <a:gsLst>
             <a:gs pos="0">
               <a:schemeClr val="phClr">
-                <a:tint val="40000"/>
-                <a:satMod val="350000"/>
+                <a:tint val="93000"/>
+                <a:satMod val="150000"/>
+                <a:shade val="98000"/>
+                <a:lumMod val="102000"/>
               </a:schemeClr>
             </a:gs>
-            <a:gs pos="40000">
+            <a:gs pos="50000">
               <a:schemeClr val="phClr">
-                <a:tint val="45000"/>
-                <a:shade val="99000"/>
-                <a:satMod val="350000"/>
+                <a:tint val="98000"/>
+                <a:satMod val="130000"/>
+                <a:shade val="90000"/>
+                <a:lumMod val="103000"/>
               </a:schemeClr>
             </a:gs>
             <a:gs pos="100000">
               <a:schemeClr val="phClr">
-                <a:shade val="20000"/>
-                <a:satMod val="255000"/>
+                <a:shade val="63000"/>
+                <a:satMod val="120000"/>
               </a:schemeClr>
             </a:gs>
           </a:gsLst>
-          <a:path path="circle">
-            <a:fillToRect l="50000" t="-80000" r="50000" b="180000"/>
-          </a:path>
-        </a:gradFill>
-        <a:gradFill rotWithShape="1">
-          <a:gsLst>
-            <a:gs pos="0">
-              <a:schemeClr val="phClr">
-                <a:tint val="80000"/>
-                <a:satMod val="300000"/>
-              </a:schemeClr>
-            </a:gs>
-            <a:gs pos="100000">
-              <a:schemeClr val="phClr">
-                <a:shade val="30000"/>
-                <a:satMod val="200000"/>
-              </a:schemeClr>
-            </a:gs>
-          </a:gsLst>
-          <a:path path="circle">
-            <a:fillToRect l="50000" t="50000" r="50000" b="50000"/>
-          </a:path>
+          <a:lin ang="5400000" scaled="0"/>
         </a:gradFill>
       </a:bgFillStyleLst>
     </a:fmtScheme>
   </a:themeElements>
-  <a:objectDefaults>
-    <a:spDef>
-      <a:spPr/>
-      <a:bodyPr/>
-      <a:lstStyle/>
-      <a:style>
-        <a:lnRef idx="1">
-          <a:schemeClr val="accent1"/>
-        </a:lnRef>
-        <a:fillRef idx="3">
-          <a:schemeClr val="accent1"/>
-        </a:fillRef>
-        <a:effectRef idx="2">
-          <a:schemeClr val="accent1"/>
-        </a:effectRef>
-        <a:fontRef idx="minor">
-          <a:schemeClr val="lt1"/>
-        </a:fontRef>
-      </a:style>
-    </a:spDef>
-    <a:lnDef>
-      <a:spPr/>
-      <a:bodyPr/>
-      <a:lstStyle/>
-      <a:style>
-        <a:lnRef idx="2">
-          <a:schemeClr val="accent1"/>
-        </a:lnRef>
-        <a:fillRef idx="0">
-          <a:schemeClr val="accent1"/>
-        </a:fillRef>
-        <a:effectRef idx="1">
-          <a:schemeClr val="accent1"/>
-        </a:effectRef>
-        <a:fontRef idx="minor">
-          <a:schemeClr val="tx1"/>
-        </a:fontRef>
-      </a:style>
-    </a:lnDef>
-  </a:objectDefaults>
+  <a:objectDefaults/>
   <a:extraClrSchemeLst/>
+  <a:extLst>
+    <a:ext uri="{05A4C25C-085E-4340-85A3-A5531E510DB2}">
+      <thm15:themeFamily xmlns:thm15="http://schemas.microsoft.com/office/thememl/2012/main" name="Office Theme" id="{62F939B6-93AF-4DB8-9C6B-D6C7DFDC589F}" vid="{4A3C46E8-61CC-4603-A589-7422A47A8E4A}"/>
+    </a:ext>
+  </a:extLst>
 </a:theme>
 </file>